--- a/docs/ProjectDesignDiagrams/ProjectDesignDiagrams.pptx
+++ b/docs/ProjectDesignDiagrams/ProjectDesignDiagrams.pptx
@@ -6,6 +6,7 @@
   </p:sldMasterIdLst>
   <p:sldIdLst>
     <p:sldId id="257" r:id="rId2"/>
+    <p:sldId id="258" r:id="rId3"/>
   </p:sldIdLst>
   <p:sldSz cx="6858000" cy="12192000"/>
   <p:notesSz cx="6858000" cy="9144000"/>
@@ -243,7 +244,7 @@
           <a:p>
             <a:fld id="{D362ADB5-A607-4434-A170-49B20D0F2AF8}" type="datetimeFigureOut">
               <a:rPr lang="en-US" smtClean="0"/>
-              <a:t>2/1/2026</a:t>
+              <a:t>2/11/2026</a:t>
             </a:fld>
             <a:endParaRPr lang="en-US"/>
           </a:p>
@@ -413,7 +414,7 @@
           <a:p>
             <a:fld id="{D362ADB5-A607-4434-A170-49B20D0F2AF8}" type="datetimeFigureOut">
               <a:rPr lang="en-US" smtClean="0"/>
-              <a:t>2/1/2026</a:t>
+              <a:t>2/11/2026</a:t>
             </a:fld>
             <a:endParaRPr lang="en-US"/>
           </a:p>
@@ -593,7 +594,7 @@
           <a:p>
             <a:fld id="{D362ADB5-A607-4434-A170-49B20D0F2AF8}" type="datetimeFigureOut">
               <a:rPr lang="en-US" smtClean="0"/>
-              <a:t>2/1/2026</a:t>
+              <a:t>2/11/2026</a:t>
             </a:fld>
             <a:endParaRPr lang="en-US"/>
           </a:p>
@@ -763,7 +764,7 @@
           <a:p>
             <a:fld id="{D362ADB5-A607-4434-A170-49B20D0F2AF8}" type="datetimeFigureOut">
               <a:rPr lang="en-US" smtClean="0"/>
-              <a:t>2/1/2026</a:t>
+              <a:t>2/11/2026</a:t>
             </a:fld>
             <a:endParaRPr lang="en-US"/>
           </a:p>
@@ -1009,7 +1010,7 @@
           <a:p>
             <a:fld id="{D362ADB5-A607-4434-A170-49B20D0F2AF8}" type="datetimeFigureOut">
               <a:rPr lang="en-US" smtClean="0"/>
-              <a:t>2/1/2026</a:t>
+              <a:t>2/11/2026</a:t>
             </a:fld>
             <a:endParaRPr lang="en-US"/>
           </a:p>
@@ -1241,7 +1242,7 @@
           <a:p>
             <a:fld id="{D362ADB5-A607-4434-A170-49B20D0F2AF8}" type="datetimeFigureOut">
               <a:rPr lang="en-US" smtClean="0"/>
-              <a:t>2/1/2026</a:t>
+              <a:t>2/11/2026</a:t>
             </a:fld>
             <a:endParaRPr lang="en-US"/>
           </a:p>
@@ -1608,7 +1609,7 @@
           <a:p>
             <a:fld id="{D362ADB5-A607-4434-A170-49B20D0F2AF8}" type="datetimeFigureOut">
               <a:rPr lang="en-US" smtClean="0"/>
-              <a:t>2/1/2026</a:t>
+              <a:t>2/11/2026</a:t>
             </a:fld>
             <a:endParaRPr lang="en-US"/>
           </a:p>
@@ -1726,7 +1727,7 @@
           <a:p>
             <a:fld id="{D362ADB5-A607-4434-A170-49B20D0F2AF8}" type="datetimeFigureOut">
               <a:rPr lang="en-US" smtClean="0"/>
-              <a:t>2/1/2026</a:t>
+              <a:t>2/11/2026</a:t>
             </a:fld>
             <a:endParaRPr lang="en-US"/>
           </a:p>
@@ -1821,7 +1822,7 @@
           <a:p>
             <a:fld id="{D362ADB5-A607-4434-A170-49B20D0F2AF8}" type="datetimeFigureOut">
               <a:rPr lang="en-US" smtClean="0"/>
-              <a:t>2/1/2026</a:t>
+              <a:t>2/11/2026</a:t>
             </a:fld>
             <a:endParaRPr lang="en-US"/>
           </a:p>
@@ -2098,7 +2099,7 @@
           <a:p>
             <a:fld id="{D362ADB5-A607-4434-A170-49B20D0F2AF8}" type="datetimeFigureOut">
               <a:rPr lang="en-US" smtClean="0"/>
-              <a:t>2/1/2026</a:t>
+              <a:t>2/11/2026</a:t>
             </a:fld>
             <a:endParaRPr lang="en-US"/>
           </a:p>
@@ -2355,7 +2356,7 @@
           <a:p>
             <a:fld id="{D362ADB5-A607-4434-A170-49B20D0F2AF8}" type="datetimeFigureOut">
               <a:rPr lang="en-US" smtClean="0"/>
-              <a:t>2/1/2026</a:t>
+              <a:t>2/11/2026</a:t>
             </a:fld>
             <a:endParaRPr lang="en-US"/>
           </a:p>
@@ -2568,7 +2569,7 @@
           <a:p>
             <a:fld id="{D362ADB5-A607-4434-A170-49B20D0F2AF8}" type="datetimeFigureOut">
               <a:rPr lang="en-US" smtClean="0"/>
-              <a:t>2/1/2026</a:t>
+              <a:t>2/11/2026</a:t>
             </a:fld>
             <a:endParaRPr lang="en-US"/>
           </a:p>
@@ -4421,6 +4422,538 @@
 </p:sld>
 </file>
 
+<file path=ppt/slides/slide2.xml><?xml version="1.0" encoding="utf-8"?>
+<p:sld xmlns:a="http://schemas.openxmlformats.org/drawingml/2006/main" xmlns:r="http://schemas.openxmlformats.org/officeDocument/2006/relationships" xmlns:p="http://schemas.openxmlformats.org/presentationml/2006/main">
+  <p:cSld>
+    <p:spTree>
+      <p:nvGrpSpPr>
+        <p:cNvPr id="1" name=""/>
+        <p:cNvGrpSpPr/>
+        <p:nvPr/>
+      </p:nvGrpSpPr>
+      <p:grpSpPr>
+        <a:xfrm>
+          <a:off x="0" y="0"/>
+          <a:ext cx="0" cy="0"/>
+          <a:chOff x="0" y="0"/>
+          <a:chExt cx="0" cy="0"/>
+        </a:xfrm>
+      </p:grpSpPr>
+      <p:sp>
+        <p:nvSpPr>
+          <p:cNvPr id="4" name="Rectangle 3">
+            <a:extLst>
+              <a:ext uri="{FF2B5EF4-FFF2-40B4-BE49-F238E27FC236}">
+                <a16:creationId xmlns:a16="http://schemas.microsoft.com/office/drawing/2014/main" id="{CE08B7F2-0052-098C-69C4-B4A71CE10609}"/>
+              </a:ext>
+            </a:extLst>
+          </p:cNvPr>
+          <p:cNvSpPr/>
+          <p:nvPr/>
+        </p:nvSpPr>
+        <p:spPr>
+          <a:xfrm>
+            <a:off x="1227668" y="5367866"/>
+            <a:ext cx="1761066" cy="812800"/>
+          </a:xfrm>
+          <a:prstGeom prst="rect">
+            <a:avLst/>
+          </a:prstGeom>
+        </p:spPr>
+        <p:style>
+          <a:lnRef idx="2">
+            <a:schemeClr val="dk1"/>
+          </a:lnRef>
+          <a:fillRef idx="1">
+            <a:schemeClr val="lt1"/>
+          </a:fillRef>
+          <a:effectRef idx="0">
+            <a:schemeClr val="dk1"/>
+          </a:effectRef>
+          <a:fontRef idx="minor">
+            <a:schemeClr val="dk1"/>
+          </a:fontRef>
+        </p:style>
+        <p:txBody>
+          <a:bodyPr rtlCol="0" anchor="ctr"/>
+          <a:lstStyle/>
+          <a:p>
+            <a:pPr algn="ctr"/>
+            <a:r>
+              <a:rPr lang="en-US" dirty="0"/>
+              <a:t>Node.js Server</a:t>
+            </a:r>
+          </a:p>
+        </p:txBody>
+      </p:sp>
+      <p:sp>
+        <p:nvSpPr>
+          <p:cNvPr id="5" name="Oval 4">
+            <a:extLst>
+              <a:ext uri="{FF2B5EF4-FFF2-40B4-BE49-F238E27FC236}">
+                <a16:creationId xmlns:a16="http://schemas.microsoft.com/office/drawing/2014/main" id="{000D2712-75D5-62D6-99A8-98E0DA72AB16}"/>
+              </a:ext>
+            </a:extLst>
+          </p:cNvPr>
+          <p:cNvSpPr/>
+          <p:nvPr/>
+        </p:nvSpPr>
+        <p:spPr>
+          <a:xfrm>
+            <a:off x="1354667" y="457200"/>
+            <a:ext cx="1507066" cy="795867"/>
+          </a:xfrm>
+          <a:prstGeom prst="ellipse">
+            <a:avLst/>
+          </a:prstGeom>
+        </p:spPr>
+        <p:style>
+          <a:lnRef idx="2">
+            <a:schemeClr val="dk1"/>
+          </a:lnRef>
+          <a:fillRef idx="1">
+            <a:schemeClr val="lt1"/>
+          </a:fillRef>
+          <a:effectRef idx="0">
+            <a:schemeClr val="dk1"/>
+          </a:effectRef>
+          <a:fontRef idx="minor">
+            <a:schemeClr val="dk1"/>
+          </a:fontRef>
+        </p:style>
+        <p:txBody>
+          <a:bodyPr rtlCol="0" anchor="ctr"/>
+          <a:lstStyle/>
+          <a:p>
+            <a:pPr algn="ctr"/>
+            <a:r>
+              <a:rPr lang="en-US" dirty="0"/>
+              <a:t>Web User</a:t>
+            </a:r>
+          </a:p>
+        </p:txBody>
+      </p:sp>
+      <p:sp>
+        <p:nvSpPr>
+          <p:cNvPr id="6" name="Rectangle 5">
+            <a:extLst>
+              <a:ext uri="{FF2B5EF4-FFF2-40B4-BE49-F238E27FC236}">
+                <a16:creationId xmlns:a16="http://schemas.microsoft.com/office/drawing/2014/main" id="{08FFD642-AD8E-9539-C917-143E084430FC}"/>
+              </a:ext>
+            </a:extLst>
+          </p:cNvPr>
+          <p:cNvSpPr/>
+          <p:nvPr/>
+        </p:nvSpPr>
+        <p:spPr>
+          <a:xfrm>
+            <a:off x="1092200" y="3073399"/>
+            <a:ext cx="2032000" cy="626533"/>
+          </a:xfrm>
+          <a:prstGeom prst="rect">
+            <a:avLst/>
+          </a:prstGeom>
+        </p:spPr>
+        <p:style>
+          <a:lnRef idx="2">
+            <a:schemeClr val="dk1"/>
+          </a:lnRef>
+          <a:fillRef idx="1">
+            <a:schemeClr val="lt1"/>
+          </a:fillRef>
+          <a:effectRef idx="0">
+            <a:schemeClr val="dk1"/>
+          </a:effectRef>
+          <a:fontRef idx="minor">
+            <a:schemeClr val="dk1"/>
+          </a:fontRef>
+        </p:style>
+        <p:txBody>
+          <a:bodyPr rtlCol="0" anchor="ctr"/>
+          <a:lstStyle/>
+          <a:p>
+            <a:pPr algn="ctr"/>
+            <a:r>
+              <a:rPr lang="en-US" dirty="0"/>
+              <a:t>To-Do list Website</a:t>
+            </a:r>
+          </a:p>
+        </p:txBody>
+      </p:sp>
+      <p:sp>
+        <p:nvSpPr>
+          <p:cNvPr id="7" name="Rectangle 6">
+            <a:extLst>
+              <a:ext uri="{FF2B5EF4-FFF2-40B4-BE49-F238E27FC236}">
+                <a16:creationId xmlns:a16="http://schemas.microsoft.com/office/drawing/2014/main" id="{43E91158-299E-6AAB-7EFD-7C51026C43B0}"/>
+              </a:ext>
+            </a:extLst>
+          </p:cNvPr>
+          <p:cNvSpPr/>
+          <p:nvPr/>
+        </p:nvSpPr>
+        <p:spPr>
+          <a:xfrm>
+            <a:off x="1100668" y="9533468"/>
+            <a:ext cx="2031999" cy="812800"/>
+          </a:xfrm>
+          <a:prstGeom prst="rect">
+            <a:avLst/>
+          </a:prstGeom>
+        </p:spPr>
+        <p:style>
+          <a:lnRef idx="2">
+            <a:schemeClr val="dk1"/>
+          </a:lnRef>
+          <a:fillRef idx="1">
+            <a:schemeClr val="lt1"/>
+          </a:fillRef>
+          <a:effectRef idx="0">
+            <a:schemeClr val="dk1"/>
+          </a:effectRef>
+          <a:fontRef idx="minor">
+            <a:schemeClr val="dk1"/>
+          </a:fontRef>
+        </p:style>
+        <p:txBody>
+          <a:bodyPr rtlCol="0" anchor="ctr"/>
+          <a:lstStyle/>
+          <a:p>
+            <a:pPr algn="ctr"/>
+            <a:r>
+              <a:rPr lang="en-US" dirty="0" err="1"/>
+              <a:t>Sql</a:t>
+            </a:r>
+            <a:r>
+              <a:rPr lang="en-US" dirty="0"/>
+              <a:t> Database</a:t>
+            </a:r>
+          </a:p>
+        </p:txBody>
+      </p:sp>
+      <p:cxnSp>
+        <p:nvCxnSpPr>
+          <p:cNvPr id="9" name="Straight Arrow Connector 8">
+            <a:extLst>
+              <a:ext uri="{FF2B5EF4-FFF2-40B4-BE49-F238E27FC236}">
+                <a16:creationId xmlns:a16="http://schemas.microsoft.com/office/drawing/2014/main" id="{24864908-1B40-71FA-2B6D-5AD0D1D9A19A}"/>
+              </a:ext>
+            </a:extLst>
+          </p:cNvPr>
+          <p:cNvCxnSpPr>
+            <a:stCxn id="5" idx="4"/>
+            <a:endCxn id="6" idx="0"/>
+          </p:cNvCxnSpPr>
+          <p:nvPr/>
+        </p:nvCxnSpPr>
+        <p:spPr>
+          <a:xfrm>
+            <a:off x="2108200" y="1253067"/>
+            <a:ext cx="0" cy="1820332"/>
+          </a:xfrm>
+          <a:prstGeom prst="straightConnector1">
+            <a:avLst/>
+          </a:prstGeom>
+          <a:ln>
+            <a:headEnd type="triangle"/>
+            <a:tailEnd type="triangle"/>
+          </a:ln>
+        </p:spPr>
+        <p:style>
+          <a:lnRef idx="2">
+            <a:schemeClr val="accent1"/>
+          </a:lnRef>
+          <a:fillRef idx="0">
+            <a:schemeClr val="accent1"/>
+          </a:fillRef>
+          <a:effectRef idx="1">
+            <a:schemeClr val="accent1"/>
+          </a:effectRef>
+          <a:fontRef idx="minor">
+            <a:schemeClr val="tx1"/>
+          </a:fontRef>
+        </p:style>
+      </p:cxnSp>
+      <p:cxnSp>
+        <p:nvCxnSpPr>
+          <p:cNvPr id="11" name="Straight Arrow Connector 10">
+            <a:extLst>
+              <a:ext uri="{FF2B5EF4-FFF2-40B4-BE49-F238E27FC236}">
+                <a16:creationId xmlns:a16="http://schemas.microsoft.com/office/drawing/2014/main" id="{6D5B87F2-49E3-600E-3268-CA7B9EDBB3B7}"/>
+              </a:ext>
+            </a:extLst>
+          </p:cNvPr>
+          <p:cNvCxnSpPr>
+            <a:stCxn id="6" idx="2"/>
+            <a:endCxn id="4" idx="0"/>
+          </p:cNvCxnSpPr>
+          <p:nvPr/>
+        </p:nvCxnSpPr>
+        <p:spPr>
+          <a:xfrm>
+            <a:off x="2108200" y="3699932"/>
+            <a:ext cx="1" cy="1667934"/>
+          </a:xfrm>
+          <a:prstGeom prst="straightConnector1">
+            <a:avLst/>
+          </a:prstGeom>
+          <a:ln>
+            <a:headEnd type="triangle"/>
+            <a:tailEnd type="triangle"/>
+          </a:ln>
+        </p:spPr>
+        <p:style>
+          <a:lnRef idx="2">
+            <a:schemeClr val="accent1"/>
+          </a:lnRef>
+          <a:fillRef idx="0">
+            <a:schemeClr val="accent1"/>
+          </a:fillRef>
+          <a:effectRef idx="1">
+            <a:schemeClr val="accent1"/>
+          </a:effectRef>
+          <a:fontRef idx="minor">
+            <a:schemeClr val="tx1"/>
+          </a:fontRef>
+        </p:style>
+      </p:cxnSp>
+      <p:cxnSp>
+        <p:nvCxnSpPr>
+          <p:cNvPr id="13" name="Straight Arrow Connector 12">
+            <a:extLst>
+              <a:ext uri="{FF2B5EF4-FFF2-40B4-BE49-F238E27FC236}">
+                <a16:creationId xmlns:a16="http://schemas.microsoft.com/office/drawing/2014/main" id="{DF11FF52-137F-3651-CE40-4539AC4A527A}"/>
+              </a:ext>
+            </a:extLst>
+          </p:cNvPr>
+          <p:cNvCxnSpPr>
+            <a:cxnSpLocks/>
+            <a:endCxn id="2" idx="0"/>
+          </p:cNvCxnSpPr>
+          <p:nvPr/>
+        </p:nvCxnSpPr>
+        <p:spPr>
+          <a:xfrm>
+            <a:off x="2108200" y="6180666"/>
+            <a:ext cx="8468" cy="1270001"/>
+          </a:xfrm>
+          <a:prstGeom prst="straightConnector1">
+            <a:avLst/>
+          </a:prstGeom>
+          <a:ln>
+            <a:headEnd type="triangle"/>
+            <a:tailEnd type="triangle"/>
+          </a:ln>
+        </p:spPr>
+        <p:style>
+          <a:lnRef idx="2">
+            <a:schemeClr val="accent1"/>
+          </a:lnRef>
+          <a:fillRef idx="0">
+            <a:schemeClr val="accent1"/>
+          </a:fillRef>
+          <a:effectRef idx="1">
+            <a:schemeClr val="accent1"/>
+          </a:effectRef>
+          <a:fontRef idx="minor">
+            <a:schemeClr val="tx1"/>
+          </a:fontRef>
+        </p:style>
+      </p:cxnSp>
+      <p:sp>
+        <p:nvSpPr>
+          <p:cNvPr id="2" name="Rectangle 1">
+            <a:extLst>
+              <a:ext uri="{FF2B5EF4-FFF2-40B4-BE49-F238E27FC236}">
+                <a16:creationId xmlns:a16="http://schemas.microsoft.com/office/drawing/2014/main" id="{F7909B2B-4DCF-32B3-B3E5-38B89930146E}"/>
+              </a:ext>
+            </a:extLst>
+          </p:cNvPr>
+          <p:cNvSpPr/>
+          <p:nvPr/>
+        </p:nvSpPr>
+        <p:spPr>
+          <a:xfrm>
+            <a:off x="1100668" y="7450667"/>
+            <a:ext cx="2031999" cy="812800"/>
+          </a:xfrm>
+          <a:prstGeom prst="rect">
+            <a:avLst/>
+          </a:prstGeom>
+        </p:spPr>
+        <p:style>
+          <a:lnRef idx="2">
+            <a:schemeClr val="dk1"/>
+          </a:lnRef>
+          <a:fillRef idx="1">
+            <a:schemeClr val="lt1"/>
+          </a:fillRef>
+          <a:effectRef idx="0">
+            <a:schemeClr val="dk1"/>
+          </a:effectRef>
+          <a:fontRef idx="minor">
+            <a:schemeClr val="dk1"/>
+          </a:fontRef>
+        </p:style>
+        <p:txBody>
+          <a:bodyPr rtlCol="0" anchor="ctr"/>
+          <a:lstStyle/>
+          <a:p>
+            <a:pPr algn="ctr"/>
+            <a:r>
+              <a:rPr lang="en-US" dirty="0"/>
+              <a:t>Database Controller</a:t>
+            </a:r>
+          </a:p>
+        </p:txBody>
+      </p:sp>
+      <p:cxnSp>
+        <p:nvCxnSpPr>
+          <p:cNvPr id="10" name="Straight Arrow Connector 9">
+            <a:extLst>
+              <a:ext uri="{FF2B5EF4-FFF2-40B4-BE49-F238E27FC236}">
+                <a16:creationId xmlns:a16="http://schemas.microsoft.com/office/drawing/2014/main" id="{6DB1FDC8-9C26-AD4C-B08B-8606D3D3DD0F}"/>
+              </a:ext>
+            </a:extLst>
+          </p:cNvPr>
+          <p:cNvCxnSpPr>
+            <a:cxnSpLocks/>
+            <a:stCxn id="2" idx="2"/>
+            <a:endCxn id="7" idx="0"/>
+          </p:cNvCxnSpPr>
+          <p:nvPr/>
+        </p:nvCxnSpPr>
+        <p:spPr>
+          <a:xfrm>
+            <a:off x="2116668" y="8263467"/>
+            <a:ext cx="0" cy="1270001"/>
+          </a:xfrm>
+          <a:prstGeom prst="straightConnector1">
+            <a:avLst/>
+          </a:prstGeom>
+          <a:ln>
+            <a:headEnd type="triangle"/>
+            <a:tailEnd type="triangle"/>
+          </a:ln>
+        </p:spPr>
+        <p:style>
+          <a:lnRef idx="2">
+            <a:schemeClr val="accent1"/>
+          </a:lnRef>
+          <a:fillRef idx="0">
+            <a:schemeClr val="accent1"/>
+          </a:fillRef>
+          <a:effectRef idx="1">
+            <a:schemeClr val="accent1"/>
+          </a:effectRef>
+          <a:fontRef idx="minor">
+            <a:schemeClr val="tx1"/>
+          </a:fontRef>
+        </p:style>
+      </p:cxnSp>
+      <p:sp>
+        <p:nvSpPr>
+          <p:cNvPr id="15" name="Oval 14">
+            <a:extLst>
+              <a:ext uri="{FF2B5EF4-FFF2-40B4-BE49-F238E27FC236}">
+                <a16:creationId xmlns:a16="http://schemas.microsoft.com/office/drawing/2014/main" id="{FB6D6608-1B4F-7F01-4196-CDD263D9F8BA}"/>
+              </a:ext>
+            </a:extLst>
+          </p:cNvPr>
+          <p:cNvSpPr/>
+          <p:nvPr/>
+        </p:nvSpPr>
+        <p:spPr>
+          <a:xfrm>
+            <a:off x="4741334" y="7467600"/>
+            <a:ext cx="1507066" cy="795867"/>
+          </a:xfrm>
+          <a:prstGeom prst="ellipse">
+            <a:avLst/>
+          </a:prstGeom>
+        </p:spPr>
+        <p:style>
+          <a:lnRef idx="2">
+            <a:schemeClr val="dk1"/>
+          </a:lnRef>
+          <a:fillRef idx="1">
+            <a:schemeClr val="lt1"/>
+          </a:fillRef>
+          <a:effectRef idx="0">
+            <a:schemeClr val="dk1"/>
+          </a:effectRef>
+          <a:fontRef idx="minor">
+            <a:schemeClr val="dk1"/>
+          </a:fontRef>
+        </p:style>
+        <p:txBody>
+          <a:bodyPr rtlCol="0" anchor="ctr"/>
+          <a:lstStyle/>
+          <a:p>
+            <a:pPr algn="ctr"/>
+            <a:r>
+              <a:rPr lang="en-US" dirty="0"/>
+              <a:t>Web User</a:t>
+            </a:r>
+          </a:p>
+        </p:txBody>
+      </p:sp>
+      <p:cxnSp>
+        <p:nvCxnSpPr>
+          <p:cNvPr id="17" name="Straight Arrow Connector 16">
+            <a:extLst>
+              <a:ext uri="{FF2B5EF4-FFF2-40B4-BE49-F238E27FC236}">
+                <a16:creationId xmlns:a16="http://schemas.microsoft.com/office/drawing/2014/main" id="{80BC38C3-39D6-66D2-F3B1-AA5AE7F86F20}"/>
+              </a:ext>
+            </a:extLst>
+          </p:cNvPr>
+          <p:cNvCxnSpPr>
+            <a:stCxn id="2" idx="3"/>
+            <a:endCxn id="15" idx="2"/>
+          </p:cNvCxnSpPr>
+          <p:nvPr/>
+        </p:nvCxnSpPr>
+        <p:spPr>
+          <a:xfrm>
+            <a:off x="3132667" y="7857067"/>
+            <a:ext cx="1608667" cy="8467"/>
+          </a:xfrm>
+          <a:prstGeom prst="straightConnector1">
+            <a:avLst/>
+          </a:prstGeom>
+          <a:ln>
+            <a:headEnd type="triangle"/>
+            <a:tailEnd type="triangle"/>
+          </a:ln>
+        </p:spPr>
+        <p:style>
+          <a:lnRef idx="2">
+            <a:schemeClr val="accent1"/>
+          </a:lnRef>
+          <a:fillRef idx="0">
+            <a:schemeClr val="accent1"/>
+          </a:fillRef>
+          <a:effectRef idx="1">
+            <a:schemeClr val="accent1"/>
+          </a:effectRef>
+          <a:fontRef idx="minor">
+            <a:schemeClr val="tx1"/>
+          </a:fontRef>
+        </p:style>
+      </p:cxnSp>
+    </p:spTree>
+    <p:extLst>
+      <p:ext uri="{BB962C8B-B14F-4D97-AF65-F5344CB8AC3E}">
+        <p14:creationId xmlns:p14="http://schemas.microsoft.com/office/powerpoint/2010/main" val="1281802143"/>
+      </p:ext>
+    </p:extLst>
+  </p:cSld>
+  <p:clrMapOvr>
+    <a:masterClrMapping/>
+  </p:clrMapOvr>
+</p:sld>
+</file>
+
 <file path=ppt/theme/theme1.xml><?xml version="1.0" encoding="utf-8"?>
 <a:theme xmlns:a="http://schemas.openxmlformats.org/drawingml/2006/main" name="Office Theme">
   <a:themeElements>

--- a/docs/ProjectDesignDiagrams/ProjectDesignDiagrams.pptx
+++ b/docs/ProjectDesignDiagrams/ProjectDesignDiagrams.pptx
@@ -2,13 +2,14 @@
 <file path=ppt/presentation.xml><?xml version="1.0" encoding="utf-8"?>
 <p:presentation xmlns:a="http://schemas.openxmlformats.org/drawingml/2006/main" xmlns:r="http://schemas.openxmlformats.org/officeDocument/2006/relationships" xmlns:p="http://schemas.openxmlformats.org/presentationml/2006/main" saveSubsetFonts="1">
   <p:sldMasterIdLst>
-    <p:sldMasterId id="2147483660" r:id="rId1"/>
+    <p:sldMasterId id="2147483672" r:id="rId1"/>
   </p:sldMasterIdLst>
   <p:sldIdLst>
     <p:sldId id="257" r:id="rId2"/>
     <p:sldId id="258" r:id="rId3"/>
+    <p:sldId id="259" r:id="rId4"/>
   </p:sldIdLst>
-  <p:sldSz cx="6858000" cy="12192000"/>
+  <p:sldSz cx="16256000" cy="12192000"/>
   <p:notesSz cx="6858000" cy="9144000"/>
   <p:defaultTextStyle>
     <a:defPPr>
@@ -142,15 +143,15 @@
         </p:nvSpPr>
         <p:spPr>
           <a:xfrm>
-            <a:off x="514350" y="1995312"/>
-            <a:ext cx="5829300" cy="4244622"/>
+            <a:off x="1219200" y="1995312"/>
+            <a:ext cx="13817600" cy="4244622"/>
           </a:xfrm>
         </p:spPr>
         <p:txBody>
           <a:bodyPr anchor="b"/>
           <a:lstStyle>
             <a:lvl1pPr algn="ctr">
-              <a:defRPr sz="4500"/>
+              <a:defRPr sz="10667"/>
             </a:lvl1pPr>
           </a:lstStyle>
           <a:p>
@@ -174,8 +175,8 @@
         </p:nvSpPr>
         <p:spPr>
           <a:xfrm>
-            <a:off x="857250" y="6403623"/>
-            <a:ext cx="5143500" cy="2943577"/>
+            <a:off x="2032000" y="6403623"/>
+            <a:ext cx="12192000" cy="2943577"/>
           </a:xfrm>
         </p:spPr>
         <p:txBody>
@@ -183,39 +184,39 @@
           <a:lstStyle>
             <a:lvl1pPr marL="0" indent="0" algn="ctr">
               <a:buNone/>
-              <a:defRPr sz="1800"/>
+              <a:defRPr sz="4267"/>
             </a:lvl1pPr>
-            <a:lvl2pPr marL="342900" indent="0" algn="ctr">
-              <a:buNone/>
-              <a:defRPr sz="1500"/>
+            <a:lvl2pPr marL="812810" indent="0" algn="ctr">
+              <a:buNone/>
+              <a:defRPr sz="3556"/>
             </a:lvl2pPr>
-            <a:lvl3pPr marL="685800" indent="0" algn="ctr">
-              <a:buNone/>
-              <a:defRPr sz="1350"/>
+            <a:lvl3pPr marL="1625620" indent="0" algn="ctr">
+              <a:buNone/>
+              <a:defRPr sz="3200"/>
             </a:lvl3pPr>
-            <a:lvl4pPr marL="1028700" indent="0" algn="ctr">
-              <a:buNone/>
-              <a:defRPr sz="1200"/>
+            <a:lvl4pPr marL="2438430" indent="0" algn="ctr">
+              <a:buNone/>
+              <a:defRPr sz="2844"/>
             </a:lvl4pPr>
-            <a:lvl5pPr marL="1371600" indent="0" algn="ctr">
-              <a:buNone/>
-              <a:defRPr sz="1200"/>
+            <a:lvl5pPr marL="3251241" indent="0" algn="ctr">
+              <a:buNone/>
+              <a:defRPr sz="2844"/>
             </a:lvl5pPr>
-            <a:lvl6pPr marL="1714500" indent="0" algn="ctr">
-              <a:buNone/>
-              <a:defRPr sz="1200"/>
+            <a:lvl6pPr marL="4064051" indent="0" algn="ctr">
+              <a:buNone/>
+              <a:defRPr sz="2844"/>
             </a:lvl6pPr>
-            <a:lvl7pPr marL="2057400" indent="0" algn="ctr">
-              <a:buNone/>
-              <a:defRPr sz="1200"/>
+            <a:lvl7pPr marL="4876861" indent="0" algn="ctr">
+              <a:buNone/>
+              <a:defRPr sz="2844"/>
             </a:lvl7pPr>
-            <a:lvl8pPr marL="2400300" indent="0" algn="ctr">
-              <a:buNone/>
-              <a:defRPr sz="1200"/>
+            <a:lvl8pPr marL="5689671" indent="0" algn="ctr">
+              <a:buNone/>
+              <a:defRPr sz="2844"/>
             </a:lvl8pPr>
-            <a:lvl9pPr marL="2743200" indent="0" algn="ctr">
-              <a:buNone/>
-              <a:defRPr sz="1200"/>
+            <a:lvl9pPr marL="6502481" indent="0" algn="ctr">
+              <a:buNone/>
+              <a:defRPr sz="2844"/>
             </a:lvl9pPr>
           </a:lstStyle>
           <a:p>
@@ -244,7 +245,7 @@
           <a:p>
             <a:fld id="{D362ADB5-A607-4434-A170-49B20D0F2AF8}" type="datetimeFigureOut">
               <a:rPr lang="en-US" smtClean="0"/>
-              <a:t>2/11/2026</a:t>
+              <a:t>3/2/2026</a:t>
             </a:fld>
             <a:endParaRPr lang="en-US"/>
           </a:p>
@@ -295,7 +296,7 @@
     </p:spTree>
     <p:extLst>
       <p:ext uri="{BB962C8B-B14F-4D97-AF65-F5344CB8AC3E}">
-        <p14:creationId xmlns:p14="http://schemas.microsoft.com/office/powerpoint/2010/main" val="1848320159"/>
+        <p14:creationId xmlns:p14="http://schemas.microsoft.com/office/powerpoint/2010/main" val="3287493878"/>
       </p:ext>
     </p:extLst>
   </p:cSld>
@@ -414,7 +415,7 @@
           <a:p>
             <a:fld id="{D362ADB5-A607-4434-A170-49B20D0F2AF8}" type="datetimeFigureOut">
               <a:rPr lang="en-US" smtClean="0"/>
-              <a:t>2/11/2026</a:t>
+              <a:t>3/2/2026</a:t>
             </a:fld>
             <a:endParaRPr lang="en-US"/>
           </a:p>
@@ -465,7 +466,7 @@
     </p:spTree>
     <p:extLst>
       <p:ext uri="{BB962C8B-B14F-4D97-AF65-F5344CB8AC3E}">
-        <p14:creationId xmlns:p14="http://schemas.microsoft.com/office/powerpoint/2010/main" val="3261175683"/>
+        <p14:creationId xmlns:p14="http://schemas.microsoft.com/office/powerpoint/2010/main" val="3426571281"/>
       </p:ext>
     </p:extLst>
   </p:cSld>
@@ -504,8 +505,8 @@
         </p:nvSpPr>
         <p:spPr>
           <a:xfrm>
-            <a:off x="4907757" y="649111"/>
-            <a:ext cx="1478756" cy="10332156"/>
+            <a:off x="11633201" y="649111"/>
+            <a:ext cx="3505200" cy="10332156"/>
           </a:xfrm>
         </p:spPr>
         <p:txBody>
@@ -532,8 +533,8 @@
         </p:nvSpPr>
         <p:spPr>
           <a:xfrm>
-            <a:off x="471488" y="649111"/>
-            <a:ext cx="4350544" cy="10332156"/>
+            <a:off x="1117601" y="649111"/>
+            <a:ext cx="10312400" cy="10332156"/>
           </a:xfrm>
         </p:spPr>
         <p:txBody>
@@ -594,7 +595,7 @@
           <a:p>
             <a:fld id="{D362ADB5-A607-4434-A170-49B20D0F2AF8}" type="datetimeFigureOut">
               <a:rPr lang="en-US" smtClean="0"/>
-              <a:t>2/11/2026</a:t>
+              <a:t>3/2/2026</a:t>
             </a:fld>
             <a:endParaRPr lang="en-US"/>
           </a:p>
@@ -645,7 +646,7 @@
     </p:spTree>
     <p:extLst>
       <p:ext uri="{BB962C8B-B14F-4D97-AF65-F5344CB8AC3E}">
-        <p14:creationId xmlns:p14="http://schemas.microsoft.com/office/powerpoint/2010/main" val="2974833284"/>
+        <p14:creationId xmlns:p14="http://schemas.microsoft.com/office/powerpoint/2010/main" val="2125058811"/>
       </p:ext>
     </p:extLst>
   </p:cSld>
@@ -764,7 +765,7 @@
           <a:p>
             <a:fld id="{D362ADB5-A607-4434-A170-49B20D0F2AF8}" type="datetimeFigureOut">
               <a:rPr lang="en-US" smtClean="0"/>
-              <a:t>2/11/2026</a:t>
+              <a:t>3/2/2026</a:t>
             </a:fld>
             <a:endParaRPr lang="en-US"/>
           </a:p>
@@ -815,7 +816,7 @@
     </p:spTree>
     <p:extLst>
       <p:ext uri="{BB962C8B-B14F-4D97-AF65-F5344CB8AC3E}">
-        <p14:creationId xmlns:p14="http://schemas.microsoft.com/office/powerpoint/2010/main" val="4017778970"/>
+        <p14:creationId xmlns:p14="http://schemas.microsoft.com/office/powerpoint/2010/main" val="2611305128"/>
       </p:ext>
     </p:extLst>
   </p:cSld>
@@ -854,15 +855,15 @@
         </p:nvSpPr>
         <p:spPr>
           <a:xfrm>
-            <a:off x="467916" y="3039537"/>
-            <a:ext cx="5915025" cy="5071532"/>
+            <a:off x="1109134" y="3039537"/>
+            <a:ext cx="14020800" cy="5071532"/>
           </a:xfrm>
         </p:spPr>
         <p:txBody>
           <a:bodyPr anchor="b"/>
           <a:lstStyle>
             <a:lvl1pPr>
-              <a:defRPr sz="4500"/>
+              <a:defRPr sz="10667"/>
             </a:lvl1pPr>
           </a:lstStyle>
           <a:p>
@@ -886,8 +887,8 @@
         </p:nvSpPr>
         <p:spPr>
           <a:xfrm>
-            <a:off x="467916" y="8159048"/>
-            <a:ext cx="5915025" cy="2666999"/>
+            <a:off x="1109134" y="8159048"/>
+            <a:ext cx="14020800" cy="2666999"/>
           </a:xfrm>
         </p:spPr>
         <p:txBody>
@@ -895,7 +896,7 @@
           <a:lstStyle>
             <a:lvl1pPr marL="0" indent="0">
               <a:buNone/>
-              <a:defRPr sz="1800">
+              <a:defRPr sz="4267">
                 <a:solidFill>
                   <a:schemeClr val="tx1">
                     <a:tint val="82000"/>
@@ -903,9 +904,9 @@
                 </a:solidFill>
               </a:defRPr>
             </a:lvl1pPr>
-            <a:lvl2pPr marL="342900" indent="0">
-              <a:buNone/>
-              <a:defRPr sz="1500">
+            <a:lvl2pPr marL="812810" indent="0">
+              <a:buNone/>
+              <a:defRPr sz="3556">
                 <a:solidFill>
                   <a:schemeClr val="tx1">
                     <a:tint val="82000"/>
@@ -913,9 +914,9 @@
                 </a:solidFill>
               </a:defRPr>
             </a:lvl2pPr>
-            <a:lvl3pPr marL="685800" indent="0">
-              <a:buNone/>
-              <a:defRPr sz="1350">
+            <a:lvl3pPr marL="1625620" indent="0">
+              <a:buNone/>
+              <a:defRPr sz="3200">
                 <a:solidFill>
                   <a:schemeClr val="tx1">
                     <a:tint val="82000"/>
@@ -923,9 +924,9 @@
                 </a:solidFill>
               </a:defRPr>
             </a:lvl3pPr>
-            <a:lvl4pPr marL="1028700" indent="0">
-              <a:buNone/>
-              <a:defRPr sz="1200">
+            <a:lvl4pPr marL="2438430" indent="0">
+              <a:buNone/>
+              <a:defRPr sz="2844">
                 <a:solidFill>
                   <a:schemeClr val="tx1">
                     <a:tint val="82000"/>
@@ -933,9 +934,9 @@
                 </a:solidFill>
               </a:defRPr>
             </a:lvl4pPr>
-            <a:lvl5pPr marL="1371600" indent="0">
-              <a:buNone/>
-              <a:defRPr sz="1200">
+            <a:lvl5pPr marL="3251241" indent="0">
+              <a:buNone/>
+              <a:defRPr sz="2844">
                 <a:solidFill>
                   <a:schemeClr val="tx1">
                     <a:tint val="82000"/>
@@ -943,9 +944,9 @@
                 </a:solidFill>
               </a:defRPr>
             </a:lvl5pPr>
-            <a:lvl6pPr marL="1714500" indent="0">
-              <a:buNone/>
-              <a:defRPr sz="1200">
+            <a:lvl6pPr marL="4064051" indent="0">
+              <a:buNone/>
+              <a:defRPr sz="2844">
                 <a:solidFill>
                   <a:schemeClr val="tx1">
                     <a:tint val="82000"/>
@@ -953,9 +954,9 @@
                 </a:solidFill>
               </a:defRPr>
             </a:lvl6pPr>
-            <a:lvl7pPr marL="2057400" indent="0">
-              <a:buNone/>
-              <a:defRPr sz="1200">
+            <a:lvl7pPr marL="4876861" indent="0">
+              <a:buNone/>
+              <a:defRPr sz="2844">
                 <a:solidFill>
                   <a:schemeClr val="tx1">
                     <a:tint val="82000"/>
@@ -963,9 +964,9 @@
                 </a:solidFill>
               </a:defRPr>
             </a:lvl7pPr>
-            <a:lvl8pPr marL="2400300" indent="0">
-              <a:buNone/>
-              <a:defRPr sz="1200">
+            <a:lvl8pPr marL="5689671" indent="0">
+              <a:buNone/>
+              <a:defRPr sz="2844">
                 <a:solidFill>
                   <a:schemeClr val="tx1">
                     <a:tint val="82000"/>
@@ -973,9 +974,9 @@
                 </a:solidFill>
               </a:defRPr>
             </a:lvl8pPr>
-            <a:lvl9pPr marL="2743200" indent="0">
-              <a:buNone/>
-              <a:defRPr sz="1200">
+            <a:lvl9pPr marL="6502481" indent="0">
+              <a:buNone/>
+              <a:defRPr sz="2844">
                 <a:solidFill>
                   <a:schemeClr val="tx1">
                     <a:tint val="82000"/>
@@ -1010,7 +1011,7 @@
           <a:p>
             <a:fld id="{D362ADB5-A607-4434-A170-49B20D0F2AF8}" type="datetimeFigureOut">
               <a:rPr lang="en-US" smtClean="0"/>
-              <a:t>2/11/2026</a:t>
+              <a:t>3/2/2026</a:t>
             </a:fld>
             <a:endParaRPr lang="en-US"/>
           </a:p>
@@ -1061,7 +1062,7 @@
     </p:spTree>
     <p:extLst>
       <p:ext uri="{BB962C8B-B14F-4D97-AF65-F5344CB8AC3E}">
-        <p14:creationId xmlns:p14="http://schemas.microsoft.com/office/powerpoint/2010/main" val="2580178968"/>
+        <p14:creationId xmlns:p14="http://schemas.microsoft.com/office/powerpoint/2010/main" val="928990459"/>
       </p:ext>
     </p:extLst>
   </p:cSld>
@@ -1123,8 +1124,8 @@
         </p:nvSpPr>
         <p:spPr>
           <a:xfrm>
-            <a:off x="471488" y="3245556"/>
-            <a:ext cx="2914650" cy="7735712"/>
+            <a:off x="1117600" y="3245556"/>
+            <a:ext cx="6908800" cy="7735712"/>
           </a:xfrm>
         </p:spPr>
         <p:txBody>
@@ -1180,8 +1181,8 @@
         </p:nvSpPr>
         <p:spPr>
           <a:xfrm>
-            <a:off x="3471863" y="3245556"/>
-            <a:ext cx="2914650" cy="7735712"/>
+            <a:off x="8229600" y="3245556"/>
+            <a:ext cx="6908800" cy="7735712"/>
           </a:xfrm>
         </p:spPr>
         <p:txBody>
@@ -1242,7 +1243,7 @@
           <a:p>
             <a:fld id="{D362ADB5-A607-4434-A170-49B20D0F2AF8}" type="datetimeFigureOut">
               <a:rPr lang="en-US" smtClean="0"/>
-              <a:t>2/11/2026</a:t>
+              <a:t>3/2/2026</a:t>
             </a:fld>
             <a:endParaRPr lang="en-US"/>
           </a:p>
@@ -1293,7 +1294,7 @@
     </p:spTree>
     <p:extLst>
       <p:ext uri="{BB962C8B-B14F-4D97-AF65-F5344CB8AC3E}">
-        <p14:creationId xmlns:p14="http://schemas.microsoft.com/office/powerpoint/2010/main" val="1033225456"/>
+        <p14:creationId xmlns:p14="http://schemas.microsoft.com/office/powerpoint/2010/main" val="3210973999"/>
       </p:ext>
     </p:extLst>
   </p:cSld>
@@ -1332,8 +1333,8 @@
         </p:nvSpPr>
         <p:spPr>
           <a:xfrm>
-            <a:off x="472381" y="649114"/>
-            <a:ext cx="5915025" cy="2356556"/>
+            <a:off x="1119717" y="649114"/>
+            <a:ext cx="14020800" cy="2356556"/>
           </a:xfrm>
         </p:spPr>
         <p:txBody>
@@ -1360,8 +1361,8 @@
         </p:nvSpPr>
         <p:spPr>
           <a:xfrm>
-            <a:off x="472381" y="2988734"/>
-            <a:ext cx="2901255" cy="1464732"/>
+            <a:off x="1119719" y="2988734"/>
+            <a:ext cx="6877049" cy="1464732"/>
           </a:xfrm>
         </p:spPr>
         <p:txBody>
@@ -1369,39 +1370,39 @@
           <a:lstStyle>
             <a:lvl1pPr marL="0" indent="0">
               <a:buNone/>
-              <a:defRPr sz="1800" b="1"/>
+              <a:defRPr sz="4267" b="1"/>
             </a:lvl1pPr>
-            <a:lvl2pPr marL="342900" indent="0">
-              <a:buNone/>
-              <a:defRPr sz="1500" b="1"/>
+            <a:lvl2pPr marL="812810" indent="0">
+              <a:buNone/>
+              <a:defRPr sz="3556" b="1"/>
             </a:lvl2pPr>
-            <a:lvl3pPr marL="685800" indent="0">
-              <a:buNone/>
-              <a:defRPr sz="1350" b="1"/>
+            <a:lvl3pPr marL="1625620" indent="0">
+              <a:buNone/>
+              <a:defRPr sz="3200" b="1"/>
             </a:lvl3pPr>
-            <a:lvl4pPr marL="1028700" indent="0">
-              <a:buNone/>
-              <a:defRPr sz="1200" b="1"/>
+            <a:lvl4pPr marL="2438430" indent="0">
+              <a:buNone/>
+              <a:defRPr sz="2844" b="1"/>
             </a:lvl4pPr>
-            <a:lvl5pPr marL="1371600" indent="0">
-              <a:buNone/>
-              <a:defRPr sz="1200" b="1"/>
+            <a:lvl5pPr marL="3251241" indent="0">
+              <a:buNone/>
+              <a:defRPr sz="2844" b="1"/>
             </a:lvl5pPr>
-            <a:lvl6pPr marL="1714500" indent="0">
-              <a:buNone/>
-              <a:defRPr sz="1200" b="1"/>
+            <a:lvl6pPr marL="4064051" indent="0">
+              <a:buNone/>
+              <a:defRPr sz="2844" b="1"/>
             </a:lvl6pPr>
-            <a:lvl7pPr marL="2057400" indent="0">
-              <a:buNone/>
-              <a:defRPr sz="1200" b="1"/>
+            <a:lvl7pPr marL="4876861" indent="0">
+              <a:buNone/>
+              <a:defRPr sz="2844" b="1"/>
             </a:lvl7pPr>
-            <a:lvl8pPr marL="2400300" indent="0">
-              <a:buNone/>
-              <a:defRPr sz="1200" b="1"/>
+            <a:lvl8pPr marL="5689671" indent="0">
+              <a:buNone/>
+              <a:defRPr sz="2844" b="1"/>
             </a:lvl8pPr>
-            <a:lvl9pPr marL="2743200" indent="0">
-              <a:buNone/>
-              <a:defRPr sz="1200" b="1"/>
+            <a:lvl9pPr marL="6502481" indent="0">
+              <a:buNone/>
+              <a:defRPr sz="2844" b="1"/>
             </a:lvl9pPr>
           </a:lstStyle>
           <a:p>
@@ -1425,8 +1426,8 @@
         </p:nvSpPr>
         <p:spPr>
           <a:xfrm>
-            <a:off x="472381" y="4453467"/>
-            <a:ext cx="2901255" cy="6550379"/>
+            <a:off x="1119719" y="4453467"/>
+            <a:ext cx="6877049" cy="6550379"/>
           </a:xfrm>
         </p:spPr>
         <p:txBody>
@@ -1482,8 +1483,8 @@
         </p:nvSpPr>
         <p:spPr>
           <a:xfrm>
-            <a:off x="3471863" y="2988734"/>
-            <a:ext cx="2915543" cy="1464732"/>
+            <a:off x="8229601" y="2988734"/>
+            <a:ext cx="6910917" cy="1464732"/>
           </a:xfrm>
         </p:spPr>
         <p:txBody>
@@ -1491,39 +1492,39 @@
           <a:lstStyle>
             <a:lvl1pPr marL="0" indent="0">
               <a:buNone/>
-              <a:defRPr sz="1800" b="1"/>
+              <a:defRPr sz="4267" b="1"/>
             </a:lvl1pPr>
-            <a:lvl2pPr marL="342900" indent="0">
-              <a:buNone/>
-              <a:defRPr sz="1500" b="1"/>
+            <a:lvl2pPr marL="812810" indent="0">
+              <a:buNone/>
+              <a:defRPr sz="3556" b="1"/>
             </a:lvl2pPr>
-            <a:lvl3pPr marL="685800" indent="0">
-              <a:buNone/>
-              <a:defRPr sz="1350" b="1"/>
+            <a:lvl3pPr marL="1625620" indent="0">
+              <a:buNone/>
+              <a:defRPr sz="3200" b="1"/>
             </a:lvl3pPr>
-            <a:lvl4pPr marL="1028700" indent="0">
-              <a:buNone/>
-              <a:defRPr sz="1200" b="1"/>
+            <a:lvl4pPr marL="2438430" indent="0">
+              <a:buNone/>
+              <a:defRPr sz="2844" b="1"/>
             </a:lvl4pPr>
-            <a:lvl5pPr marL="1371600" indent="0">
-              <a:buNone/>
-              <a:defRPr sz="1200" b="1"/>
+            <a:lvl5pPr marL="3251241" indent="0">
+              <a:buNone/>
+              <a:defRPr sz="2844" b="1"/>
             </a:lvl5pPr>
-            <a:lvl6pPr marL="1714500" indent="0">
-              <a:buNone/>
-              <a:defRPr sz="1200" b="1"/>
+            <a:lvl6pPr marL="4064051" indent="0">
+              <a:buNone/>
+              <a:defRPr sz="2844" b="1"/>
             </a:lvl6pPr>
-            <a:lvl7pPr marL="2057400" indent="0">
-              <a:buNone/>
-              <a:defRPr sz="1200" b="1"/>
+            <a:lvl7pPr marL="4876861" indent="0">
+              <a:buNone/>
+              <a:defRPr sz="2844" b="1"/>
             </a:lvl7pPr>
-            <a:lvl8pPr marL="2400300" indent="0">
-              <a:buNone/>
-              <a:defRPr sz="1200" b="1"/>
+            <a:lvl8pPr marL="5689671" indent="0">
+              <a:buNone/>
+              <a:defRPr sz="2844" b="1"/>
             </a:lvl8pPr>
-            <a:lvl9pPr marL="2743200" indent="0">
-              <a:buNone/>
-              <a:defRPr sz="1200" b="1"/>
+            <a:lvl9pPr marL="6502481" indent="0">
+              <a:buNone/>
+              <a:defRPr sz="2844" b="1"/>
             </a:lvl9pPr>
           </a:lstStyle>
           <a:p>
@@ -1547,8 +1548,8 @@
         </p:nvSpPr>
         <p:spPr>
           <a:xfrm>
-            <a:off x="3471863" y="4453467"/>
-            <a:ext cx="2915543" cy="6550379"/>
+            <a:off x="8229601" y="4453467"/>
+            <a:ext cx="6910917" cy="6550379"/>
           </a:xfrm>
         </p:spPr>
         <p:txBody>
@@ -1609,7 +1610,7 @@
           <a:p>
             <a:fld id="{D362ADB5-A607-4434-A170-49B20D0F2AF8}" type="datetimeFigureOut">
               <a:rPr lang="en-US" smtClean="0"/>
-              <a:t>2/11/2026</a:t>
+              <a:t>3/2/2026</a:t>
             </a:fld>
             <a:endParaRPr lang="en-US"/>
           </a:p>
@@ -1660,7 +1661,7 @@
     </p:spTree>
     <p:extLst>
       <p:ext uri="{BB962C8B-B14F-4D97-AF65-F5344CB8AC3E}">
-        <p14:creationId xmlns:p14="http://schemas.microsoft.com/office/powerpoint/2010/main" val="1094914932"/>
+        <p14:creationId xmlns:p14="http://schemas.microsoft.com/office/powerpoint/2010/main" val="1373021403"/>
       </p:ext>
     </p:extLst>
   </p:cSld>
@@ -1727,7 +1728,7 @@
           <a:p>
             <a:fld id="{D362ADB5-A607-4434-A170-49B20D0F2AF8}" type="datetimeFigureOut">
               <a:rPr lang="en-US" smtClean="0"/>
-              <a:t>2/11/2026</a:t>
+              <a:t>3/2/2026</a:t>
             </a:fld>
             <a:endParaRPr lang="en-US"/>
           </a:p>
@@ -1778,7 +1779,7 @@
     </p:spTree>
     <p:extLst>
       <p:ext uri="{BB962C8B-B14F-4D97-AF65-F5344CB8AC3E}">
-        <p14:creationId xmlns:p14="http://schemas.microsoft.com/office/powerpoint/2010/main" val="2563585125"/>
+        <p14:creationId xmlns:p14="http://schemas.microsoft.com/office/powerpoint/2010/main" val="753342756"/>
       </p:ext>
     </p:extLst>
   </p:cSld>
@@ -1822,7 +1823,7 @@
           <a:p>
             <a:fld id="{D362ADB5-A607-4434-A170-49B20D0F2AF8}" type="datetimeFigureOut">
               <a:rPr lang="en-US" smtClean="0"/>
-              <a:t>2/11/2026</a:t>
+              <a:t>3/2/2026</a:t>
             </a:fld>
             <a:endParaRPr lang="en-US"/>
           </a:p>
@@ -1873,7 +1874,7 @@
     </p:spTree>
     <p:extLst>
       <p:ext uri="{BB962C8B-B14F-4D97-AF65-F5344CB8AC3E}">
-        <p14:creationId xmlns:p14="http://schemas.microsoft.com/office/powerpoint/2010/main" val="2352141426"/>
+        <p14:creationId xmlns:p14="http://schemas.microsoft.com/office/powerpoint/2010/main" val="2289384141"/>
       </p:ext>
     </p:extLst>
   </p:cSld>
@@ -1912,15 +1913,15 @@
         </p:nvSpPr>
         <p:spPr>
           <a:xfrm>
-            <a:off x="472381" y="812800"/>
-            <a:ext cx="2211884" cy="2844800"/>
+            <a:off x="1119717" y="812800"/>
+            <a:ext cx="5242983" cy="2844800"/>
           </a:xfrm>
         </p:spPr>
         <p:txBody>
           <a:bodyPr anchor="b"/>
           <a:lstStyle>
             <a:lvl1pPr>
-              <a:defRPr sz="2400"/>
+              <a:defRPr sz="5689"/>
             </a:lvl1pPr>
           </a:lstStyle>
           <a:p>
@@ -1944,39 +1945,39 @@
         </p:nvSpPr>
         <p:spPr>
           <a:xfrm>
-            <a:off x="2915543" y="1755425"/>
-            <a:ext cx="3471863" cy="8664222"/>
+            <a:off x="6910917" y="1755425"/>
+            <a:ext cx="8229600" cy="8664222"/>
           </a:xfrm>
         </p:spPr>
         <p:txBody>
           <a:bodyPr/>
           <a:lstStyle>
             <a:lvl1pPr>
-              <a:defRPr sz="2400"/>
+              <a:defRPr sz="5689"/>
             </a:lvl1pPr>
             <a:lvl2pPr>
-              <a:defRPr sz="2100"/>
+              <a:defRPr sz="4978"/>
             </a:lvl2pPr>
             <a:lvl3pPr>
-              <a:defRPr sz="1800"/>
+              <a:defRPr sz="4267"/>
             </a:lvl3pPr>
             <a:lvl4pPr>
-              <a:defRPr sz="1500"/>
+              <a:defRPr sz="3556"/>
             </a:lvl4pPr>
             <a:lvl5pPr>
-              <a:defRPr sz="1500"/>
+              <a:defRPr sz="3556"/>
             </a:lvl5pPr>
             <a:lvl6pPr>
-              <a:defRPr sz="1500"/>
+              <a:defRPr sz="3556"/>
             </a:lvl6pPr>
             <a:lvl7pPr>
-              <a:defRPr sz="1500"/>
+              <a:defRPr sz="3556"/>
             </a:lvl7pPr>
             <a:lvl8pPr>
-              <a:defRPr sz="1500"/>
+              <a:defRPr sz="3556"/>
             </a:lvl8pPr>
             <a:lvl9pPr>
-              <a:defRPr sz="1500"/>
+              <a:defRPr sz="3556"/>
             </a:lvl9pPr>
           </a:lstStyle>
           <a:p>
@@ -2029,8 +2030,8 @@
         </p:nvSpPr>
         <p:spPr>
           <a:xfrm>
-            <a:off x="472381" y="3657600"/>
-            <a:ext cx="2211884" cy="6776156"/>
+            <a:off x="1119717" y="3657600"/>
+            <a:ext cx="5242983" cy="6776156"/>
           </a:xfrm>
         </p:spPr>
         <p:txBody>
@@ -2038,39 +2039,39 @@
           <a:lstStyle>
             <a:lvl1pPr marL="0" indent="0">
               <a:buNone/>
-              <a:defRPr sz="1200"/>
+              <a:defRPr sz="2844"/>
             </a:lvl1pPr>
-            <a:lvl2pPr marL="342900" indent="0">
-              <a:buNone/>
-              <a:defRPr sz="1050"/>
+            <a:lvl2pPr marL="812810" indent="0">
+              <a:buNone/>
+              <a:defRPr sz="2489"/>
             </a:lvl2pPr>
-            <a:lvl3pPr marL="685800" indent="0">
-              <a:buNone/>
-              <a:defRPr sz="900"/>
+            <a:lvl3pPr marL="1625620" indent="0">
+              <a:buNone/>
+              <a:defRPr sz="2133"/>
             </a:lvl3pPr>
-            <a:lvl4pPr marL="1028700" indent="0">
-              <a:buNone/>
-              <a:defRPr sz="750"/>
+            <a:lvl4pPr marL="2438430" indent="0">
+              <a:buNone/>
+              <a:defRPr sz="1778"/>
             </a:lvl4pPr>
-            <a:lvl5pPr marL="1371600" indent="0">
-              <a:buNone/>
-              <a:defRPr sz="750"/>
+            <a:lvl5pPr marL="3251241" indent="0">
+              <a:buNone/>
+              <a:defRPr sz="1778"/>
             </a:lvl5pPr>
-            <a:lvl6pPr marL="1714500" indent="0">
-              <a:buNone/>
-              <a:defRPr sz="750"/>
+            <a:lvl6pPr marL="4064051" indent="0">
+              <a:buNone/>
+              <a:defRPr sz="1778"/>
             </a:lvl6pPr>
-            <a:lvl7pPr marL="2057400" indent="0">
-              <a:buNone/>
-              <a:defRPr sz="750"/>
+            <a:lvl7pPr marL="4876861" indent="0">
+              <a:buNone/>
+              <a:defRPr sz="1778"/>
             </a:lvl7pPr>
-            <a:lvl8pPr marL="2400300" indent="0">
-              <a:buNone/>
-              <a:defRPr sz="750"/>
+            <a:lvl8pPr marL="5689671" indent="0">
+              <a:buNone/>
+              <a:defRPr sz="1778"/>
             </a:lvl8pPr>
-            <a:lvl9pPr marL="2743200" indent="0">
-              <a:buNone/>
-              <a:defRPr sz="750"/>
+            <a:lvl9pPr marL="6502481" indent="0">
+              <a:buNone/>
+              <a:defRPr sz="1778"/>
             </a:lvl9pPr>
           </a:lstStyle>
           <a:p>
@@ -2099,7 +2100,7 @@
           <a:p>
             <a:fld id="{D362ADB5-A607-4434-A170-49B20D0F2AF8}" type="datetimeFigureOut">
               <a:rPr lang="en-US" smtClean="0"/>
-              <a:t>2/11/2026</a:t>
+              <a:t>3/2/2026</a:t>
             </a:fld>
             <a:endParaRPr lang="en-US"/>
           </a:p>
@@ -2150,7 +2151,7 @@
     </p:spTree>
     <p:extLst>
       <p:ext uri="{BB962C8B-B14F-4D97-AF65-F5344CB8AC3E}">
-        <p14:creationId xmlns:p14="http://schemas.microsoft.com/office/powerpoint/2010/main" val="605218946"/>
+        <p14:creationId xmlns:p14="http://schemas.microsoft.com/office/powerpoint/2010/main" val="4064958010"/>
       </p:ext>
     </p:extLst>
   </p:cSld>
@@ -2189,15 +2190,15 @@
         </p:nvSpPr>
         <p:spPr>
           <a:xfrm>
-            <a:off x="472381" y="812800"/>
-            <a:ext cx="2211884" cy="2844800"/>
+            <a:off x="1119717" y="812800"/>
+            <a:ext cx="5242983" cy="2844800"/>
           </a:xfrm>
         </p:spPr>
         <p:txBody>
           <a:bodyPr anchor="b"/>
           <a:lstStyle>
             <a:lvl1pPr>
-              <a:defRPr sz="2400"/>
+              <a:defRPr sz="5689"/>
             </a:lvl1pPr>
           </a:lstStyle>
           <a:p>
@@ -2221,8 +2222,8 @@
         </p:nvSpPr>
         <p:spPr>
           <a:xfrm>
-            <a:off x="2915543" y="1755425"/>
-            <a:ext cx="3471863" cy="8664222"/>
+            <a:off x="6910917" y="1755425"/>
+            <a:ext cx="8229600" cy="8664222"/>
           </a:xfrm>
         </p:spPr>
         <p:txBody>
@@ -2230,39 +2231,39 @@
           <a:lstStyle>
             <a:lvl1pPr marL="0" indent="0">
               <a:buNone/>
-              <a:defRPr sz="2400"/>
+              <a:defRPr sz="5689"/>
             </a:lvl1pPr>
-            <a:lvl2pPr marL="342900" indent="0">
-              <a:buNone/>
-              <a:defRPr sz="2100"/>
+            <a:lvl2pPr marL="812810" indent="0">
+              <a:buNone/>
+              <a:defRPr sz="4978"/>
             </a:lvl2pPr>
-            <a:lvl3pPr marL="685800" indent="0">
-              <a:buNone/>
-              <a:defRPr sz="1800"/>
+            <a:lvl3pPr marL="1625620" indent="0">
+              <a:buNone/>
+              <a:defRPr sz="4267"/>
             </a:lvl3pPr>
-            <a:lvl4pPr marL="1028700" indent="0">
-              <a:buNone/>
-              <a:defRPr sz="1500"/>
+            <a:lvl4pPr marL="2438430" indent="0">
+              <a:buNone/>
+              <a:defRPr sz="3556"/>
             </a:lvl4pPr>
-            <a:lvl5pPr marL="1371600" indent="0">
-              <a:buNone/>
-              <a:defRPr sz="1500"/>
+            <a:lvl5pPr marL="3251241" indent="0">
+              <a:buNone/>
+              <a:defRPr sz="3556"/>
             </a:lvl5pPr>
-            <a:lvl6pPr marL="1714500" indent="0">
-              <a:buNone/>
-              <a:defRPr sz="1500"/>
+            <a:lvl6pPr marL="4064051" indent="0">
+              <a:buNone/>
+              <a:defRPr sz="3556"/>
             </a:lvl6pPr>
-            <a:lvl7pPr marL="2057400" indent="0">
-              <a:buNone/>
-              <a:defRPr sz="1500"/>
+            <a:lvl7pPr marL="4876861" indent="0">
+              <a:buNone/>
+              <a:defRPr sz="3556"/>
             </a:lvl7pPr>
-            <a:lvl8pPr marL="2400300" indent="0">
-              <a:buNone/>
-              <a:defRPr sz="1500"/>
+            <a:lvl8pPr marL="5689671" indent="0">
+              <a:buNone/>
+              <a:defRPr sz="3556"/>
             </a:lvl8pPr>
-            <a:lvl9pPr marL="2743200" indent="0">
-              <a:buNone/>
-              <a:defRPr sz="1500"/>
+            <a:lvl9pPr marL="6502481" indent="0">
+              <a:buNone/>
+              <a:defRPr sz="3556"/>
             </a:lvl9pPr>
           </a:lstStyle>
           <a:p>
@@ -2286,8 +2287,8 @@
         </p:nvSpPr>
         <p:spPr>
           <a:xfrm>
-            <a:off x="472381" y="3657600"/>
-            <a:ext cx="2211884" cy="6776156"/>
+            <a:off x="1119717" y="3657600"/>
+            <a:ext cx="5242983" cy="6776156"/>
           </a:xfrm>
         </p:spPr>
         <p:txBody>
@@ -2295,39 +2296,39 @@
           <a:lstStyle>
             <a:lvl1pPr marL="0" indent="0">
               <a:buNone/>
-              <a:defRPr sz="1200"/>
+              <a:defRPr sz="2844"/>
             </a:lvl1pPr>
-            <a:lvl2pPr marL="342900" indent="0">
-              <a:buNone/>
-              <a:defRPr sz="1050"/>
+            <a:lvl2pPr marL="812810" indent="0">
+              <a:buNone/>
+              <a:defRPr sz="2489"/>
             </a:lvl2pPr>
-            <a:lvl3pPr marL="685800" indent="0">
-              <a:buNone/>
-              <a:defRPr sz="900"/>
+            <a:lvl3pPr marL="1625620" indent="0">
+              <a:buNone/>
+              <a:defRPr sz="2133"/>
             </a:lvl3pPr>
-            <a:lvl4pPr marL="1028700" indent="0">
-              <a:buNone/>
-              <a:defRPr sz="750"/>
+            <a:lvl4pPr marL="2438430" indent="0">
+              <a:buNone/>
+              <a:defRPr sz="1778"/>
             </a:lvl4pPr>
-            <a:lvl5pPr marL="1371600" indent="0">
-              <a:buNone/>
-              <a:defRPr sz="750"/>
+            <a:lvl5pPr marL="3251241" indent="0">
+              <a:buNone/>
+              <a:defRPr sz="1778"/>
             </a:lvl5pPr>
-            <a:lvl6pPr marL="1714500" indent="0">
-              <a:buNone/>
-              <a:defRPr sz="750"/>
+            <a:lvl6pPr marL="4064051" indent="0">
+              <a:buNone/>
+              <a:defRPr sz="1778"/>
             </a:lvl6pPr>
-            <a:lvl7pPr marL="2057400" indent="0">
-              <a:buNone/>
-              <a:defRPr sz="750"/>
+            <a:lvl7pPr marL="4876861" indent="0">
+              <a:buNone/>
+              <a:defRPr sz="1778"/>
             </a:lvl7pPr>
-            <a:lvl8pPr marL="2400300" indent="0">
-              <a:buNone/>
-              <a:defRPr sz="750"/>
+            <a:lvl8pPr marL="5689671" indent="0">
+              <a:buNone/>
+              <a:defRPr sz="1778"/>
             </a:lvl8pPr>
-            <a:lvl9pPr marL="2743200" indent="0">
-              <a:buNone/>
-              <a:defRPr sz="750"/>
+            <a:lvl9pPr marL="6502481" indent="0">
+              <a:buNone/>
+              <a:defRPr sz="1778"/>
             </a:lvl9pPr>
           </a:lstStyle>
           <a:p>
@@ -2356,7 +2357,7 @@
           <a:p>
             <a:fld id="{D362ADB5-A607-4434-A170-49B20D0F2AF8}" type="datetimeFigureOut">
               <a:rPr lang="en-US" smtClean="0"/>
-              <a:t>2/11/2026</a:t>
+              <a:t>3/2/2026</a:t>
             </a:fld>
             <a:endParaRPr lang="en-US"/>
           </a:p>
@@ -2407,7 +2408,7 @@
     </p:spTree>
     <p:extLst>
       <p:ext uri="{BB962C8B-B14F-4D97-AF65-F5344CB8AC3E}">
-        <p14:creationId xmlns:p14="http://schemas.microsoft.com/office/powerpoint/2010/main" val="1865502892"/>
+        <p14:creationId xmlns:p14="http://schemas.microsoft.com/office/powerpoint/2010/main" val="285005356"/>
       </p:ext>
     </p:extLst>
   </p:cSld>
@@ -2451,8 +2452,8 @@
         </p:nvSpPr>
         <p:spPr>
           <a:xfrm>
-            <a:off x="471488" y="649114"/>
-            <a:ext cx="5915025" cy="2356556"/>
+            <a:off x="1117600" y="649114"/>
+            <a:ext cx="14020800" cy="2356556"/>
           </a:xfrm>
           <a:prstGeom prst="rect">
             <a:avLst/>
@@ -2484,8 +2485,8 @@
         </p:nvSpPr>
         <p:spPr>
           <a:xfrm>
-            <a:off x="471488" y="3245556"/>
-            <a:ext cx="5915025" cy="7735712"/>
+            <a:off x="1117600" y="3245556"/>
+            <a:ext cx="14020800" cy="7735712"/>
           </a:xfrm>
           <a:prstGeom prst="rect">
             <a:avLst/>
@@ -2546,8 +2547,8 @@
         </p:nvSpPr>
         <p:spPr>
           <a:xfrm>
-            <a:off x="471488" y="11300181"/>
-            <a:ext cx="1543050" cy="649111"/>
+            <a:off x="1117600" y="11300181"/>
+            <a:ext cx="3657600" cy="649111"/>
           </a:xfrm>
           <a:prstGeom prst="rect">
             <a:avLst/>
@@ -2557,7 +2558,7 @@
           <a:bodyPr vert="horz" lIns="91440" tIns="45720" rIns="91440" bIns="45720" rtlCol="0" anchor="ctr"/>
           <a:lstStyle>
             <a:lvl1pPr algn="l">
-              <a:defRPr sz="900">
+              <a:defRPr sz="2133">
                 <a:solidFill>
                   <a:schemeClr val="tx1">
                     <a:tint val="82000"/>
@@ -2569,7 +2570,7 @@
           <a:p>
             <a:fld id="{D362ADB5-A607-4434-A170-49B20D0F2AF8}" type="datetimeFigureOut">
               <a:rPr lang="en-US" smtClean="0"/>
-              <a:t>2/11/2026</a:t>
+              <a:t>3/2/2026</a:t>
             </a:fld>
             <a:endParaRPr lang="en-US"/>
           </a:p>
@@ -2587,8 +2588,8 @@
         </p:nvSpPr>
         <p:spPr>
           <a:xfrm>
-            <a:off x="2271713" y="11300181"/>
-            <a:ext cx="2314575" cy="649111"/>
+            <a:off x="5384800" y="11300181"/>
+            <a:ext cx="5486400" cy="649111"/>
           </a:xfrm>
           <a:prstGeom prst="rect">
             <a:avLst/>
@@ -2598,7 +2599,7 @@
           <a:bodyPr vert="horz" lIns="91440" tIns="45720" rIns="91440" bIns="45720" rtlCol="0" anchor="ctr"/>
           <a:lstStyle>
             <a:lvl1pPr algn="ctr">
-              <a:defRPr sz="900">
+              <a:defRPr sz="2133">
                 <a:solidFill>
                   <a:schemeClr val="tx1">
                     <a:tint val="82000"/>
@@ -2624,8 +2625,8 @@
         </p:nvSpPr>
         <p:spPr>
           <a:xfrm>
-            <a:off x="4843463" y="11300181"/>
-            <a:ext cx="1543050" cy="649111"/>
+            <a:off x="11480800" y="11300181"/>
+            <a:ext cx="3657600" cy="649111"/>
           </a:xfrm>
           <a:prstGeom prst="rect">
             <a:avLst/>
@@ -2635,7 +2636,7 @@
           <a:bodyPr vert="horz" lIns="91440" tIns="45720" rIns="91440" bIns="45720" rtlCol="0" anchor="ctr"/>
           <a:lstStyle>
             <a:lvl1pPr algn="r">
-              <a:defRPr sz="900">
+              <a:defRPr sz="2133">
                 <a:solidFill>
                   <a:schemeClr val="tx1">
                     <a:tint val="82000"/>
@@ -2656,27 +2657,27 @@
     </p:spTree>
     <p:extLst>
       <p:ext uri="{BB962C8B-B14F-4D97-AF65-F5344CB8AC3E}">
-        <p14:creationId xmlns:p14="http://schemas.microsoft.com/office/powerpoint/2010/main" val="522099799"/>
+        <p14:creationId xmlns:p14="http://schemas.microsoft.com/office/powerpoint/2010/main" val="4032772594"/>
       </p:ext>
     </p:extLst>
   </p:cSld>
   <p:clrMap bg1="lt1" tx1="dk1" bg2="lt2" tx2="dk2" accent1="accent1" accent2="accent2" accent3="accent3" accent4="accent4" accent5="accent5" accent6="accent6" hlink="hlink" folHlink="folHlink"/>
   <p:sldLayoutIdLst>
-    <p:sldLayoutId id="2147483661" r:id="rId1"/>
-    <p:sldLayoutId id="2147483662" r:id="rId2"/>
-    <p:sldLayoutId id="2147483663" r:id="rId3"/>
-    <p:sldLayoutId id="2147483664" r:id="rId4"/>
-    <p:sldLayoutId id="2147483665" r:id="rId5"/>
-    <p:sldLayoutId id="2147483666" r:id="rId6"/>
-    <p:sldLayoutId id="2147483667" r:id="rId7"/>
-    <p:sldLayoutId id="2147483668" r:id="rId8"/>
-    <p:sldLayoutId id="2147483669" r:id="rId9"/>
-    <p:sldLayoutId id="2147483670" r:id="rId10"/>
-    <p:sldLayoutId id="2147483671" r:id="rId11"/>
+    <p:sldLayoutId id="2147483673" r:id="rId1"/>
+    <p:sldLayoutId id="2147483674" r:id="rId2"/>
+    <p:sldLayoutId id="2147483675" r:id="rId3"/>
+    <p:sldLayoutId id="2147483676" r:id="rId4"/>
+    <p:sldLayoutId id="2147483677" r:id="rId5"/>
+    <p:sldLayoutId id="2147483678" r:id="rId6"/>
+    <p:sldLayoutId id="2147483679" r:id="rId7"/>
+    <p:sldLayoutId id="2147483680" r:id="rId8"/>
+    <p:sldLayoutId id="2147483681" r:id="rId9"/>
+    <p:sldLayoutId id="2147483682" r:id="rId10"/>
+    <p:sldLayoutId id="2147483683" r:id="rId11"/>
   </p:sldLayoutIdLst>
   <p:txStyles>
     <p:titleStyle>
-      <a:lvl1pPr algn="l" defTabSz="685800" rtl="0" eaLnBrk="1" latinLnBrk="0" hangingPunct="1">
+      <a:lvl1pPr algn="l" defTabSz="1625620" rtl="0" eaLnBrk="1" latinLnBrk="0" hangingPunct="1">
         <a:lnSpc>
           <a:spcPct val="90000"/>
         </a:lnSpc>
@@ -2684,7 +2685,7 @@
           <a:spcPct val="0"/>
         </a:spcBef>
         <a:buNone/>
-        <a:defRPr sz="3300" kern="1200">
+        <a:defRPr sz="7822" kern="1200">
           <a:solidFill>
             <a:schemeClr val="tx1"/>
           </a:solidFill>
@@ -2695,16 +2696,16 @@
       </a:lvl1pPr>
     </p:titleStyle>
     <p:bodyStyle>
-      <a:lvl1pPr marL="171450" indent="-171450" algn="l" defTabSz="685800" rtl="0" eaLnBrk="1" latinLnBrk="0" hangingPunct="1">
+      <a:lvl1pPr marL="406405" indent="-406405" algn="l" defTabSz="1625620" rtl="0" eaLnBrk="1" latinLnBrk="0" hangingPunct="1">
         <a:lnSpc>
           <a:spcPct val="90000"/>
         </a:lnSpc>
         <a:spcBef>
-          <a:spcPts val="750"/>
+          <a:spcPts val="1778"/>
         </a:spcBef>
         <a:buFont typeface="Arial" panose="020B0604020202020204" pitchFamily="34" charset="0"/>
         <a:buChar char="•"/>
-        <a:defRPr sz="2100" kern="1200">
+        <a:defRPr sz="4978" kern="1200">
           <a:solidFill>
             <a:schemeClr val="tx1"/>
           </a:solidFill>
@@ -2713,16 +2714,16 @@
           <a:cs typeface="+mn-cs"/>
         </a:defRPr>
       </a:lvl1pPr>
-      <a:lvl2pPr marL="514350" indent="-171450" algn="l" defTabSz="685800" rtl="0" eaLnBrk="1" latinLnBrk="0" hangingPunct="1">
+      <a:lvl2pPr marL="1219215" indent="-406405" algn="l" defTabSz="1625620" rtl="0" eaLnBrk="1" latinLnBrk="0" hangingPunct="1">
         <a:lnSpc>
           <a:spcPct val="90000"/>
         </a:lnSpc>
         <a:spcBef>
-          <a:spcPts val="375"/>
+          <a:spcPts val="889"/>
         </a:spcBef>
         <a:buFont typeface="Arial" panose="020B0604020202020204" pitchFamily="34" charset="0"/>
         <a:buChar char="•"/>
-        <a:defRPr sz="1800" kern="1200">
+        <a:defRPr sz="4267" kern="1200">
           <a:solidFill>
             <a:schemeClr val="tx1"/>
           </a:solidFill>
@@ -2731,16 +2732,16 @@
           <a:cs typeface="+mn-cs"/>
         </a:defRPr>
       </a:lvl2pPr>
-      <a:lvl3pPr marL="857250" indent="-171450" algn="l" defTabSz="685800" rtl="0" eaLnBrk="1" latinLnBrk="0" hangingPunct="1">
+      <a:lvl3pPr marL="2032025" indent="-406405" algn="l" defTabSz="1625620" rtl="0" eaLnBrk="1" latinLnBrk="0" hangingPunct="1">
         <a:lnSpc>
           <a:spcPct val="90000"/>
         </a:lnSpc>
         <a:spcBef>
-          <a:spcPts val="375"/>
+          <a:spcPts val="889"/>
         </a:spcBef>
         <a:buFont typeface="Arial" panose="020B0604020202020204" pitchFamily="34" charset="0"/>
         <a:buChar char="•"/>
-        <a:defRPr sz="1500" kern="1200">
+        <a:defRPr sz="3556" kern="1200">
           <a:solidFill>
             <a:schemeClr val="tx1"/>
           </a:solidFill>
@@ -2749,16 +2750,16 @@
           <a:cs typeface="+mn-cs"/>
         </a:defRPr>
       </a:lvl3pPr>
-      <a:lvl4pPr marL="1200150" indent="-171450" algn="l" defTabSz="685800" rtl="0" eaLnBrk="1" latinLnBrk="0" hangingPunct="1">
+      <a:lvl4pPr marL="2844836" indent="-406405" algn="l" defTabSz="1625620" rtl="0" eaLnBrk="1" latinLnBrk="0" hangingPunct="1">
         <a:lnSpc>
           <a:spcPct val="90000"/>
         </a:lnSpc>
         <a:spcBef>
-          <a:spcPts val="375"/>
+          <a:spcPts val="889"/>
         </a:spcBef>
         <a:buFont typeface="Arial" panose="020B0604020202020204" pitchFamily="34" charset="0"/>
         <a:buChar char="•"/>
-        <a:defRPr sz="1350" kern="1200">
+        <a:defRPr sz="3200" kern="1200">
           <a:solidFill>
             <a:schemeClr val="tx1"/>
           </a:solidFill>
@@ -2767,16 +2768,16 @@
           <a:cs typeface="+mn-cs"/>
         </a:defRPr>
       </a:lvl4pPr>
-      <a:lvl5pPr marL="1543050" indent="-171450" algn="l" defTabSz="685800" rtl="0" eaLnBrk="1" latinLnBrk="0" hangingPunct="1">
+      <a:lvl5pPr marL="3657646" indent="-406405" algn="l" defTabSz="1625620" rtl="0" eaLnBrk="1" latinLnBrk="0" hangingPunct="1">
         <a:lnSpc>
           <a:spcPct val="90000"/>
         </a:lnSpc>
         <a:spcBef>
-          <a:spcPts val="375"/>
+          <a:spcPts val="889"/>
         </a:spcBef>
         <a:buFont typeface="Arial" panose="020B0604020202020204" pitchFamily="34" charset="0"/>
         <a:buChar char="•"/>
-        <a:defRPr sz="1350" kern="1200">
+        <a:defRPr sz="3200" kern="1200">
           <a:solidFill>
             <a:schemeClr val="tx1"/>
           </a:solidFill>
@@ -2785,16 +2786,16 @@
           <a:cs typeface="+mn-cs"/>
         </a:defRPr>
       </a:lvl5pPr>
-      <a:lvl6pPr marL="1885950" indent="-171450" algn="l" defTabSz="685800" rtl="0" eaLnBrk="1" latinLnBrk="0" hangingPunct="1">
+      <a:lvl6pPr marL="4470456" indent="-406405" algn="l" defTabSz="1625620" rtl="0" eaLnBrk="1" latinLnBrk="0" hangingPunct="1">
         <a:lnSpc>
           <a:spcPct val="90000"/>
         </a:lnSpc>
         <a:spcBef>
-          <a:spcPts val="375"/>
+          <a:spcPts val="889"/>
         </a:spcBef>
         <a:buFont typeface="Arial" panose="020B0604020202020204" pitchFamily="34" charset="0"/>
         <a:buChar char="•"/>
-        <a:defRPr sz="1350" kern="1200">
+        <a:defRPr sz="3200" kern="1200">
           <a:solidFill>
             <a:schemeClr val="tx1"/>
           </a:solidFill>
@@ -2803,16 +2804,16 @@
           <a:cs typeface="+mn-cs"/>
         </a:defRPr>
       </a:lvl6pPr>
-      <a:lvl7pPr marL="2228850" indent="-171450" algn="l" defTabSz="685800" rtl="0" eaLnBrk="1" latinLnBrk="0" hangingPunct="1">
+      <a:lvl7pPr marL="5283266" indent="-406405" algn="l" defTabSz="1625620" rtl="0" eaLnBrk="1" latinLnBrk="0" hangingPunct="1">
         <a:lnSpc>
           <a:spcPct val="90000"/>
         </a:lnSpc>
         <a:spcBef>
-          <a:spcPts val="375"/>
+          <a:spcPts val="889"/>
         </a:spcBef>
         <a:buFont typeface="Arial" panose="020B0604020202020204" pitchFamily="34" charset="0"/>
         <a:buChar char="•"/>
-        <a:defRPr sz="1350" kern="1200">
+        <a:defRPr sz="3200" kern="1200">
           <a:solidFill>
             <a:schemeClr val="tx1"/>
           </a:solidFill>
@@ -2821,16 +2822,16 @@
           <a:cs typeface="+mn-cs"/>
         </a:defRPr>
       </a:lvl7pPr>
-      <a:lvl8pPr marL="2571750" indent="-171450" algn="l" defTabSz="685800" rtl="0" eaLnBrk="1" latinLnBrk="0" hangingPunct="1">
+      <a:lvl8pPr marL="6096076" indent="-406405" algn="l" defTabSz="1625620" rtl="0" eaLnBrk="1" latinLnBrk="0" hangingPunct="1">
         <a:lnSpc>
           <a:spcPct val="90000"/>
         </a:lnSpc>
         <a:spcBef>
-          <a:spcPts val="375"/>
+          <a:spcPts val="889"/>
         </a:spcBef>
         <a:buFont typeface="Arial" panose="020B0604020202020204" pitchFamily="34" charset="0"/>
         <a:buChar char="•"/>
-        <a:defRPr sz="1350" kern="1200">
+        <a:defRPr sz="3200" kern="1200">
           <a:solidFill>
             <a:schemeClr val="tx1"/>
           </a:solidFill>
@@ -2839,16 +2840,16 @@
           <a:cs typeface="+mn-cs"/>
         </a:defRPr>
       </a:lvl8pPr>
-      <a:lvl9pPr marL="2914650" indent="-171450" algn="l" defTabSz="685800" rtl="0" eaLnBrk="1" latinLnBrk="0" hangingPunct="1">
+      <a:lvl9pPr marL="6908886" indent="-406405" algn="l" defTabSz="1625620" rtl="0" eaLnBrk="1" latinLnBrk="0" hangingPunct="1">
         <a:lnSpc>
           <a:spcPct val="90000"/>
         </a:lnSpc>
         <a:spcBef>
-          <a:spcPts val="375"/>
+          <a:spcPts val="889"/>
         </a:spcBef>
         <a:buFont typeface="Arial" panose="020B0604020202020204" pitchFamily="34" charset="0"/>
         <a:buChar char="•"/>
-        <a:defRPr sz="1350" kern="1200">
+        <a:defRPr sz="3200" kern="1200">
           <a:solidFill>
             <a:schemeClr val="tx1"/>
           </a:solidFill>
@@ -2862,8 +2863,8 @@
       <a:defPPr>
         <a:defRPr lang="en-US"/>
       </a:defPPr>
-      <a:lvl1pPr marL="0" algn="l" defTabSz="685800" rtl="0" eaLnBrk="1" latinLnBrk="0" hangingPunct="1">
-        <a:defRPr sz="1350" kern="1200">
+      <a:lvl1pPr marL="0" algn="l" defTabSz="1625620" rtl="0" eaLnBrk="1" latinLnBrk="0" hangingPunct="1">
+        <a:defRPr sz="3200" kern="1200">
           <a:solidFill>
             <a:schemeClr val="tx1"/>
           </a:solidFill>
@@ -2872,8 +2873,8 @@
           <a:cs typeface="+mn-cs"/>
         </a:defRPr>
       </a:lvl1pPr>
-      <a:lvl2pPr marL="342900" algn="l" defTabSz="685800" rtl="0" eaLnBrk="1" latinLnBrk="0" hangingPunct="1">
-        <a:defRPr sz="1350" kern="1200">
+      <a:lvl2pPr marL="812810" algn="l" defTabSz="1625620" rtl="0" eaLnBrk="1" latinLnBrk="0" hangingPunct="1">
+        <a:defRPr sz="3200" kern="1200">
           <a:solidFill>
             <a:schemeClr val="tx1"/>
           </a:solidFill>
@@ -2882,8 +2883,8 @@
           <a:cs typeface="+mn-cs"/>
         </a:defRPr>
       </a:lvl2pPr>
-      <a:lvl3pPr marL="685800" algn="l" defTabSz="685800" rtl="0" eaLnBrk="1" latinLnBrk="0" hangingPunct="1">
-        <a:defRPr sz="1350" kern="1200">
+      <a:lvl3pPr marL="1625620" algn="l" defTabSz="1625620" rtl="0" eaLnBrk="1" latinLnBrk="0" hangingPunct="1">
+        <a:defRPr sz="3200" kern="1200">
           <a:solidFill>
             <a:schemeClr val="tx1"/>
           </a:solidFill>
@@ -2892,8 +2893,8 @@
           <a:cs typeface="+mn-cs"/>
         </a:defRPr>
       </a:lvl3pPr>
-      <a:lvl4pPr marL="1028700" algn="l" defTabSz="685800" rtl="0" eaLnBrk="1" latinLnBrk="0" hangingPunct="1">
-        <a:defRPr sz="1350" kern="1200">
+      <a:lvl4pPr marL="2438430" algn="l" defTabSz="1625620" rtl="0" eaLnBrk="1" latinLnBrk="0" hangingPunct="1">
+        <a:defRPr sz="3200" kern="1200">
           <a:solidFill>
             <a:schemeClr val="tx1"/>
           </a:solidFill>
@@ -2902,8 +2903,8 @@
           <a:cs typeface="+mn-cs"/>
         </a:defRPr>
       </a:lvl4pPr>
-      <a:lvl5pPr marL="1371600" algn="l" defTabSz="685800" rtl="0" eaLnBrk="1" latinLnBrk="0" hangingPunct="1">
-        <a:defRPr sz="1350" kern="1200">
+      <a:lvl5pPr marL="3251241" algn="l" defTabSz="1625620" rtl="0" eaLnBrk="1" latinLnBrk="0" hangingPunct="1">
+        <a:defRPr sz="3200" kern="1200">
           <a:solidFill>
             <a:schemeClr val="tx1"/>
           </a:solidFill>
@@ -2912,8 +2913,8 @@
           <a:cs typeface="+mn-cs"/>
         </a:defRPr>
       </a:lvl5pPr>
-      <a:lvl6pPr marL="1714500" algn="l" defTabSz="685800" rtl="0" eaLnBrk="1" latinLnBrk="0" hangingPunct="1">
-        <a:defRPr sz="1350" kern="1200">
+      <a:lvl6pPr marL="4064051" algn="l" defTabSz="1625620" rtl="0" eaLnBrk="1" latinLnBrk="0" hangingPunct="1">
+        <a:defRPr sz="3200" kern="1200">
           <a:solidFill>
             <a:schemeClr val="tx1"/>
           </a:solidFill>
@@ -2922,8 +2923,8 @@
           <a:cs typeface="+mn-cs"/>
         </a:defRPr>
       </a:lvl6pPr>
-      <a:lvl7pPr marL="2057400" algn="l" defTabSz="685800" rtl="0" eaLnBrk="1" latinLnBrk="0" hangingPunct="1">
-        <a:defRPr sz="1350" kern="1200">
+      <a:lvl7pPr marL="4876861" algn="l" defTabSz="1625620" rtl="0" eaLnBrk="1" latinLnBrk="0" hangingPunct="1">
+        <a:defRPr sz="3200" kern="1200">
           <a:solidFill>
             <a:schemeClr val="tx1"/>
           </a:solidFill>
@@ -2932,8 +2933,8 @@
           <a:cs typeface="+mn-cs"/>
         </a:defRPr>
       </a:lvl7pPr>
-      <a:lvl8pPr marL="2400300" algn="l" defTabSz="685800" rtl="0" eaLnBrk="1" latinLnBrk="0" hangingPunct="1">
-        <a:defRPr sz="1350" kern="1200">
+      <a:lvl8pPr marL="5689671" algn="l" defTabSz="1625620" rtl="0" eaLnBrk="1" latinLnBrk="0" hangingPunct="1">
+        <a:defRPr sz="3200" kern="1200">
           <a:solidFill>
             <a:schemeClr val="tx1"/>
           </a:solidFill>
@@ -2942,8 +2943,8 @@
           <a:cs typeface="+mn-cs"/>
         </a:defRPr>
       </a:lvl8pPr>
-      <a:lvl9pPr marL="2743200" algn="l" defTabSz="685800" rtl="0" eaLnBrk="1" latinLnBrk="0" hangingPunct="1">
-        <a:defRPr sz="1350" kern="1200">
+      <a:lvl9pPr marL="6502481" algn="l" defTabSz="1625620" rtl="0" eaLnBrk="1" latinLnBrk="0" hangingPunct="1">
+        <a:defRPr sz="3200" kern="1200">
           <a:solidFill>
             <a:schemeClr val="tx1"/>
           </a:solidFill>
@@ -2994,8 +2995,8 @@
         </p:nvSpPr>
         <p:spPr>
           <a:xfrm>
-            <a:off x="3115733" y="2235199"/>
-            <a:ext cx="1608667" cy="965200"/>
+            <a:off x="7385442" y="-3055528"/>
+            <a:ext cx="3813137" cy="2287881"/>
           </a:xfrm>
           <a:prstGeom prst="rect">
             <a:avLst/>
@@ -3022,37 +3023,15 @@
           <a:bodyPr rtlCol="0" anchor="ctr"/>
           <a:lstStyle/>
           <a:p>
-            <a:pPr marL="0" marR="0" lvl="0" indent="0" algn="ctr" defTabSz="457200" rtl="0" eaLnBrk="1" fontAlgn="auto" latinLnBrk="0" hangingPunct="1">
-              <a:lnSpc>
-                <a:spcPct val="100000"/>
-              </a:lnSpc>
-              <a:spcBef>
-                <a:spcPts val="0"/>
-              </a:spcBef>
-              <a:spcAft>
-                <a:spcPts val="0"/>
-              </a:spcAft>
-              <a:buClrTx/>
-              <a:buSzTx/>
-              <a:buFontTx/>
-              <a:buNone/>
-              <a:tabLst/>
+            <a:pPr algn="ctr" defTabSz="1083747">
               <a:defRPr/>
             </a:pPr>
             <a:r>
-              <a:rPr kumimoji="0" lang="en-US" sz="1800" b="0" i="0" u="none" strike="noStrike" kern="1200" cap="none" spc="0" normalizeH="0" baseline="0" noProof="0" dirty="0">
-                <a:ln>
-                  <a:noFill/>
-                </a:ln>
+              <a:rPr lang="en-US" sz="4267" dirty="0">
                 <a:solidFill>
                   <a:prstClr val="black"/>
                 </a:solidFill>
-                <a:effectLst/>
-                <a:uLnTx/>
-                <a:uFillTx/>
                 <a:latin typeface="Aptos" panose="02110004020202020204"/>
-                <a:ea typeface="+mn-ea"/>
-                <a:cs typeface="+mn-cs"/>
               </a:rPr>
               <a:t>Slide</a:t>
             </a:r>
@@ -3073,8 +3052,8 @@
         </p:nvSpPr>
         <p:spPr>
           <a:xfrm>
-            <a:off x="3115733" y="2065866"/>
-            <a:ext cx="3335867" cy="169333"/>
+            <a:off x="7385443" y="-3456909"/>
+            <a:ext cx="7907240" cy="401382"/>
           </a:xfrm>
           <a:prstGeom prst="rect">
             <a:avLst/>
@@ -3101,37 +3080,15 @@
           <a:bodyPr rtlCol="0" anchor="ctr"/>
           <a:lstStyle/>
           <a:p>
-            <a:pPr marL="0" marR="0" lvl="0" indent="0" algn="ctr" defTabSz="457200" rtl="0" eaLnBrk="1" fontAlgn="auto" latinLnBrk="0" hangingPunct="1">
-              <a:lnSpc>
-                <a:spcPct val="100000"/>
-              </a:lnSpc>
-              <a:spcBef>
-                <a:spcPts val="0"/>
-              </a:spcBef>
-              <a:spcAft>
-                <a:spcPts val="0"/>
-              </a:spcAft>
-              <a:buClrTx/>
-              <a:buSzTx/>
-              <a:buFontTx/>
-              <a:buNone/>
-              <a:tabLst/>
+            <a:pPr algn="ctr" defTabSz="1083747">
               <a:defRPr/>
             </a:pPr>
             <a:r>
-              <a:rPr kumimoji="0" lang="en-US" sz="1800" b="0" i="0" u="none" strike="noStrike" kern="1200" cap="none" spc="0" normalizeH="0" baseline="0" noProof="0" dirty="0">
-                <a:ln>
-                  <a:noFill/>
-                </a:ln>
+              <a:rPr lang="en-US" sz="4267" dirty="0">
                 <a:solidFill>
                   <a:prstClr val="black"/>
                 </a:solidFill>
-                <a:effectLst/>
-                <a:uLnTx/>
-                <a:uFillTx/>
                 <a:latin typeface="Aptos" panose="02110004020202020204"/>
-                <a:ea typeface="+mn-ea"/>
-                <a:cs typeface="+mn-cs"/>
               </a:rPr>
               <a:t>Track</a:t>
             </a:r>
@@ -3152,8 +3109,8 @@
         </p:nvSpPr>
         <p:spPr>
           <a:xfrm>
-            <a:off x="4783666" y="2370666"/>
-            <a:ext cx="1608667" cy="677334"/>
+            <a:off x="11339061" y="-2734421"/>
+            <a:ext cx="3813137" cy="1605532"/>
           </a:xfrm>
           <a:prstGeom prst="rect">
             <a:avLst/>
@@ -3180,37 +3137,15 @@
           <a:bodyPr rtlCol="0" anchor="ctr"/>
           <a:lstStyle/>
           <a:p>
-            <a:pPr marL="0" marR="0" lvl="0" indent="0" algn="ctr" defTabSz="457200" rtl="0" eaLnBrk="1" fontAlgn="auto" latinLnBrk="0" hangingPunct="1">
-              <a:lnSpc>
-                <a:spcPct val="100000"/>
-              </a:lnSpc>
-              <a:spcBef>
-                <a:spcPts val="0"/>
-              </a:spcBef>
-              <a:spcAft>
-                <a:spcPts val="0"/>
-              </a:spcAft>
-              <a:buClrTx/>
-              <a:buSzTx/>
-              <a:buFontTx/>
-              <a:buNone/>
-              <a:tabLst/>
+            <a:pPr algn="ctr" defTabSz="1083747">
               <a:defRPr/>
             </a:pPr>
             <a:r>
-              <a:rPr kumimoji="0" lang="en-US" sz="1800" b="0" i="0" u="none" strike="noStrike" kern="1200" cap="none" spc="0" normalizeH="0" baseline="0" noProof="0" dirty="0">
-                <a:ln>
-                  <a:noFill/>
-                </a:ln>
+              <a:rPr lang="en-US" sz="4267" dirty="0">
                 <a:solidFill>
                   <a:prstClr val="black"/>
                 </a:solidFill>
-                <a:effectLst/>
-                <a:uLnTx/>
-                <a:uFillTx/>
                 <a:latin typeface="Aptos" panose="02110004020202020204"/>
-                <a:ea typeface="+mn-ea"/>
-                <a:cs typeface="+mn-cs"/>
               </a:rPr>
               <a:t>“DONE!”</a:t>
             </a:r>
@@ -3231,8 +3166,8 @@
         </p:nvSpPr>
         <p:spPr>
           <a:xfrm>
-            <a:off x="1083734" y="2370666"/>
-            <a:ext cx="762001" cy="677334"/>
+            <a:off x="2568852" y="-2734421"/>
+            <a:ext cx="1806225" cy="1605532"/>
           </a:xfrm>
           <a:prstGeom prst="ellipse">
             <a:avLst/>
@@ -3259,53 +3194,23 @@
           <a:bodyPr rtlCol="0" anchor="ctr"/>
           <a:lstStyle/>
           <a:p>
-            <a:pPr marL="0" marR="0" lvl="0" indent="0" algn="ctr" defTabSz="457200" rtl="0" eaLnBrk="1" fontAlgn="auto" latinLnBrk="0" hangingPunct="1">
-              <a:lnSpc>
-                <a:spcPct val="100000"/>
-              </a:lnSpc>
-              <a:spcBef>
-                <a:spcPts val="0"/>
-              </a:spcBef>
-              <a:spcAft>
-                <a:spcPts val="0"/>
-              </a:spcAft>
-              <a:buClrTx/>
-              <a:buSzTx/>
-              <a:buFontTx/>
-              <a:buNone/>
-              <a:tabLst/>
+            <a:pPr algn="ctr" defTabSz="1083747">
               <a:defRPr/>
             </a:pPr>
             <a:r>
-              <a:rPr kumimoji="0" lang="en-US" sz="1800" b="0" i="0" u="none" strike="noStrike" kern="1200" cap="none" spc="0" normalizeH="0" baseline="0" noProof="0" dirty="0" err="1">
-                <a:ln>
-                  <a:noFill/>
-                </a:ln>
+              <a:rPr lang="en-US" sz="4267" dirty="0" err="1">
                 <a:solidFill>
                   <a:prstClr val="black"/>
                 </a:solidFill>
-                <a:effectLst/>
-                <a:uLnTx/>
-                <a:uFillTx/>
                 <a:latin typeface="Aptos" panose="02110004020202020204"/>
-                <a:ea typeface="+mn-ea"/>
-                <a:cs typeface="+mn-cs"/>
               </a:rPr>
               <a:t>Btn</a:t>
             </a:r>
-            <a:endParaRPr kumimoji="0" lang="en-US" sz="1800" b="0" i="0" u="none" strike="noStrike" kern="1200" cap="none" spc="0" normalizeH="0" baseline="0" noProof="0" dirty="0">
-              <a:ln>
-                <a:noFill/>
-              </a:ln>
+            <a:endParaRPr lang="en-US" sz="4267" dirty="0">
               <a:solidFill>
                 <a:prstClr val="black"/>
               </a:solidFill>
-              <a:effectLst/>
-              <a:uLnTx/>
-              <a:uFillTx/>
               <a:latin typeface="Aptos" panose="02110004020202020204"/>
-              <a:ea typeface="+mn-ea"/>
-              <a:cs typeface="+mn-cs"/>
             </a:endParaRPr>
           </a:p>
         </p:txBody>
@@ -3324,8 +3229,8 @@
         </p:nvSpPr>
         <p:spPr>
           <a:xfrm>
-            <a:off x="4842933" y="4047065"/>
-            <a:ext cx="1608667" cy="965200"/>
+            <a:off x="11479546" y="1239265"/>
+            <a:ext cx="3813137" cy="2287881"/>
           </a:xfrm>
           <a:prstGeom prst="rect">
             <a:avLst/>
@@ -3352,37 +3257,15 @@
           <a:bodyPr rtlCol="0" anchor="ctr"/>
           <a:lstStyle/>
           <a:p>
-            <a:pPr marL="0" marR="0" lvl="0" indent="0" algn="ctr" defTabSz="457200" rtl="0" eaLnBrk="1" fontAlgn="auto" latinLnBrk="0" hangingPunct="1">
-              <a:lnSpc>
-                <a:spcPct val="100000"/>
-              </a:lnSpc>
-              <a:spcBef>
-                <a:spcPts val="0"/>
-              </a:spcBef>
-              <a:spcAft>
-                <a:spcPts val="0"/>
-              </a:spcAft>
-              <a:buClrTx/>
-              <a:buSzTx/>
-              <a:buFontTx/>
-              <a:buNone/>
-              <a:tabLst/>
+            <a:pPr algn="ctr" defTabSz="1083747">
               <a:defRPr/>
             </a:pPr>
             <a:r>
-              <a:rPr kumimoji="0" lang="en-US" sz="1800" b="0" i="0" u="none" strike="noStrike" kern="1200" cap="none" spc="0" normalizeH="0" baseline="0" noProof="0" dirty="0">
-                <a:ln>
-                  <a:noFill/>
-                </a:ln>
+              <a:rPr lang="en-US" sz="4267" dirty="0">
                 <a:solidFill>
                   <a:prstClr val="black"/>
                 </a:solidFill>
-                <a:effectLst/>
-                <a:uLnTx/>
-                <a:uFillTx/>
                 <a:latin typeface="Aptos" panose="02110004020202020204"/>
-                <a:ea typeface="+mn-ea"/>
-                <a:cs typeface="+mn-cs"/>
               </a:rPr>
               <a:t>Slide</a:t>
             </a:r>
@@ -3403,8 +3286,8 @@
         </p:nvSpPr>
         <p:spPr>
           <a:xfrm>
-            <a:off x="3115733" y="3877732"/>
-            <a:ext cx="3335867" cy="169333"/>
+            <a:off x="7385443" y="837884"/>
+            <a:ext cx="7907240" cy="401382"/>
           </a:xfrm>
           <a:prstGeom prst="rect">
             <a:avLst/>
@@ -3431,37 +3314,15 @@
           <a:bodyPr rtlCol="0" anchor="ctr"/>
           <a:lstStyle/>
           <a:p>
-            <a:pPr marL="0" marR="0" lvl="0" indent="0" algn="ctr" defTabSz="457200" rtl="0" eaLnBrk="1" fontAlgn="auto" latinLnBrk="0" hangingPunct="1">
-              <a:lnSpc>
-                <a:spcPct val="100000"/>
-              </a:lnSpc>
-              <a:spcBef>
-                <a:spcPts val="0"/>
-              </a:spcBef>
-              <a:spcAft>
-                <a:spcPts val="0"/>
-              </a:spcAft>
-              <a:buClrTx/>
-              <a:buSzTx/>
-              <a:buFontTx/>
-              <a:buNone/>
-              <a:tabLst/>
+            <a:pPr algn="ctr" defTabSz="1083747">
               <a:defRPr/>
             </a:pPr>
             <a:r>
-              <a:rPr kumimoji="0" lang="en-US" sz="1800" b="0" i="0" u="none" strike="noStrike" kern="1200" cap="none" spc="0" normalizeH="0" baseline="0" noProof="0" dirty="0">
-                <a:ln>
-                  <a:noFill/>
-                </a:ln>
+              <a:rPr lang="en-US" sz="4267" dirty="0">
                 <a:solidFill>
                   <a:prstClr val="black"/>
                 </a:solidFill>
-                <a:effectLst/>
-                <a:uLnTx/>
-                <a:uFillTx/>
                 <a:latin typeface="Aptos" panose="02110004020202020204"/>
-                <a:ea typeface="+mn-ea"/>
-                <a:cs typeface="+mn-cs"/>
               </a:rPr>
               <a:t>Track</a:t>
             </a:r>
@@ -3482,8 +3343,8 @@
         </p:nvSpPr>
         <p:spPr>
           <a:xfrm>
-            <a:off x="3115733" y="4182532"/>
-            <a:ext cx="1608667" cy="677334"/>
+            <a:off x="7385442" y="1560372"/>
+            <a:ext cx="3813137" cy="1605532"/>
           </a:xfrm>
           <a:prstGeom prst="rect">
             <a:avLst/>
@@ -3510,37 +3371,15 @@
           <a:bodyPr rtlCol="0" anchor="ctr"/>
           <a:lstStyle/>
           <a:p>
-            <a:pPr marL="0" marR="0" lvl="0" indent="0" algn="ctr" defTabSz="457200" rtl="0" eaLnBrk="1" fontAlgn="auto" latinLnBrk="0" hangingPunct="1">
-              <a:lnSpc>
-                <a:spcPct val="100000"/>
-              </a:lnSpc>
-              <a:spcBef>
-                <a:spcPts val="0"/>
-              </a:spcBef>
-              <a:spcAft>
-                <a:spcPts val="0"/>
-              </a:spcAft>
-              <a:buClrTx/>
-              <a:buSzTx/>
-              <a:buFontTx/>
-              <a:buNone/>
-              <a:tabLst/>
+            <a:pPr algn="ctr" defTabSz="1083747">
               <a:defRPr/>
             </a:pPr>
             <a:r>
-              <a:rPr kumimoji="0" lang="en-US" sz="1800" b="0" i="0" u="none" strike="noStrike" kern="1200" cap="none" spc="0" normalizeH="0" baseline="0" noProof="0" dirty="0">
-                <a:ln>
-                  <a:noFill/>
-                </a:ln>
+              <a:rPr lang="en-US" sz="4267" dirty="0">
                 <a:solidFill>
                   <a:prstClr val="black"/>
                 </a:solidFill>
-                <a:effectLst/>
-                <a:uLnTx/>
-                <a:uFillTx/>
                 <a:latin typeface="Aptos" panose="02110004020202020204"/>
-                <a:ea typeface="+mn-ea"/>
-                <a:cs typeface="+mn-cs"/>
               </a:rPr>
               <a:t>“Not Done”</a:t>
             </a:r>
@@ -3561,8 +3400,8 @@
         </p:nvSpPr>
         <p:spPr>
           <a:xfrm>
-            <a:off x="1083734" y="4182532"/>
-            <a:ext cx="762001" cy="677334"/>
+            <a:off x="2568852" y="1560372"/>
+            <a:ext cx="1806225" cy="1605532"/>
           </a:xfrm>
           <a:prstGeom prst="ellipse">
             <a:avLst/>
@@ -3589,53 +3428,23 @@
           <a:bodyPr rtlCol="0" anchor="ctr"/>
           <a:lstStyle/>
           <a:p>
-            <a:pPr marL="0" marR="0" lvl="0" indent="0" algn="ctr" defTabSz="457200" rtl="0" eaLnBrk="1" fontAlgn="auto" latinLnBrk="0" hangingPunct="1">
-              <a:lnSpc>
-                <a:spcPct val="100000"/>
-              </a:lnSpc>
-              <a:spcBef>
-                <a:spcPts val="0"/>
-              </a:spcBef>
-              <a:spcAft>
-                <a:spcPts val="0"/>
-              </a:spcAft>
-              <a:buClrTx/>
-              <a:buSzTx/>
-              <a:buFontTx/>
-              <a:buNone/>
-              <a:tabLst/>
+            <a:pPr algn="ctr" defTabSz="1083747">
               <a:defRPr/>
             </a:pPr>
             <a:r>
-              <a:rPr kumimoji="0" lang="en-US" sz="1800" b="0" i="0" u="none" strike="noStrike" kern="1200" cap="none" spc="0" normalizeH="0" baseline="0" noProof="0" dirty="0" err="1">
-                <a:ln>
-                  <a:noFill/>
-                </a:ln>
+              <a:rPr lang="en-US" sz="4267" dirty="0" err="1">
                 <a:solidFill>
                   <a:prstClr val="black"/>
                 </a:solidFill>
-                <a:effectLst/>
-                <a:uLnTx/>
-                <a:uFillTx/>
                 <a:latin typeface="Aptos" panose="02110004020202020204"/>
-                <a:ea typeface="+mn-ea"/>
-                <a:cs typeface="+mn-cs"/>
               </a:rPr>
               <a:t>Btn</a:t>
             </a:r>
-            <a:endParaRPr kumimoji="0" lang="en-US" sz="1800" b="0" i="0" u="none" strike="noStrike" kern="1200" cap="none" spc="0" normalizeH="0" baseline="0" noProof="0" dirty="0">
-              <a:ln>
-                <a:noFill/>
-              </a:ln>
+            <a:endParaRPr lang="en-US" sz="4267" dirty="0">
               <a:solidFill>
                 <a:prstClr val="black"/>
               </a:solidFill>
-              <a:effectLst/>
-              <a:uLnTx/>
-              <a:uFillTx/>
               <a:latin typeface="Aptos" panose="02110004020202020204"/>
-              <a:ea typeface="+mn-ea"/>
-              <a:cs typeface="+mn-cs"/>
             </a:endParaRPr>
           </a:p>
         </p:txBody>
@@ -3654,8 +3463,8 @@
         </p:nvSpPr>
         <p:spPr>
           <a:xfrm>
-            <a:off x="2116668" y="5777466"/>
-            <a:ext cx="2802467" cy="369332"/>
+            <a:off x="5017288" y="5340957"/>
+            <a:ext cx="6642885" cy="748988"/>
           </a:xfrm>
           <a:prstGeom prst="rect">
             <a:avLst/>
@@ -3668,48 +3477,17 @@
           </a:bodyPr>
           <a:lstStyle/>
           <a:p>
-            <a:pPr marL="0" marR="0" lvl="0" indent="0" algn="l" defTabSz="457200" rtl="0" eaLnBrk="1" fontAlgn="auto" latinLnBrk="0" hangingPunct="1">
-              <a:lnSpc>
-                <a:spcPct val="100000"/>
-              </a:lnSpc>
-              <a:spcBef>
-                <a:spcPts val="0"/>
-              </a:spcBef>
-              <a:spcAft>
-                <a:spcPts val="0"/>
-              </a:spcAft>
-              <a:buClrTx/>
-              <a:buSzTx/>
-              <a:buFontTx/>
-              <a:buNone/>
-              <a:tabLst/>
+            <a:pPr defTabSz="1083747">
               <a:defRPr/>
             </a:pPr>
             <a:r>
-              <a:rPr lang="en-US" dirty="0">
+              <a:rPr lang="en-US" sz="4267" dirty="0">
                 <a:solidFill>
                   <a:prstClr val="black"/>
                 </a:solidFill>
                 <a:latin typeface="Aptos" panose="02110004020202020204"/>
               </a:rPr>
-              <a:t>15</a:t>
-            </a:r>
-            <a:r>
-              <a:rPr kumimoji="0" lang="en-US" sz="1800" b="0" i="0" u="none" strike="noStrike" kern="1200" cap="none" spc="0" normalizeH="0" baseline="0" noProof="0" dirty="0">
-                <a:ln>
-                  <a:noFill/>
-                </a:ln>
-                <a:solidFill>
-                  <a:prstClr val="black"/>
-                </a:solidFill>
-                <a:effectLst/>
-                <a:uLnTx/>
-                <a:uFillTx/>
-                <a:latin typeface="Aptos" panose="02110004020202020204"/>
-                <a:ea typeface="+mn-ea"/>
-                <a:cs typeface="+mn-cs"/>
-              </a:rPr>
-              <a:t> of the above segments</a:t>
+              <a:t>15 of the above segments</a:t>
             </a:r>
           </a:p>
         </p:txBody>
@@ -3728,8 +3506,8 @@
         </p:nvSpPr>
         <p:spPr>
           <a:xfrm>
-            <a:off x="2116668" y="1974333"/>
-            <a:ext cx="1151466" cy="369333"/>
+            <a:off x="5017287" y="-3673876"/>
+            <a:ext cx="2729401" cy="875456"/>
           </a:xfrm>
           <a:prstGeom prst="ellipse">
             <a:avLst/>
@@ -3755,37 +3533,15 @@
           <a:bodyPr rtlCol="0" anchor="ctr"/>
           <a:lstStyle/>
           <a:p>
-            <a:pPr marL="0" marR="0" lvl="0" indent="0" algn="ctr" defTabSz="457200" rtl="0" eaLnBrk="1" fontAlgn="auto" latinLnBrk="0" hangingPunct="1">
-              <a:lnSpc>
-                <a:spcPct val="100000"/>
-              </a:lnSpc>
-              <a:spcBef>
-                <a:spcPts val="0"/>
-              </a:spcBef>
-              <a:spcAft>
-                <a:spcPts val="0"/>
-              </a:spcAft>
-              <a:buClrTx/>
-              <a:buSzTx/>
-              <a:buFontTx/>
-              <a:buNone/>
-              <a:tabLst/>
+            <a:pPr algn="ctr" defTabSz="1083747">
               <a:defRPr/>
             </a:pPr>
             <a:r>
-              <a:rPr kumimoji="0" lang="en-US" sz="1800" b="0" i="0" u="none" strike="noStrike" kern="1200" cap="none" spc="0" normalizeH="0" baseline="0" noProof="0" dirty="0">
-                <a:ln>
-                  <a:noFill/>
-                </a:ln>
+              <a:rPr lang="en-US" sz="4267" dirty="0">
                 <a:solidFill>
                   <a:prstClr val="white"/>
                 </a:solidFill>
-                <a:effectLst/>
-                <a:uLnTx/>
-                <a:uFillTx/>
                 <a:latin typeface="Aptos" panose="02110004020202020204"/>
-                <a:ea typeface="+mn-ea"/>
-                <a:cs typeface="+mn-cs"/>
               </a:rPr>
               <a:t>Motor</a:t>
             </a:r>
@@ -3806,8 +3562,8 @@
         </p:nvSpPr>
         <p:spPr>
           <a:xfrm>
-            <a:off x="2074335" y="3764000"/>
-            <a:ext cx="1151466" cy="369333"/>
+            <a:off x="4916942" y="568297"/>
+            <a:ext cx="2729401" cy="875456"/>
           </a:xfrm>
           <a:prstGeom prst="ellipse">
             <a:avLst/>
@@ -3833,37 +3589,15 @@
           <a:bodyPr rtlCol="0" anchor="ctr"/>
           <a:lstStyle/>
           <a:p>
-            <a:pPr marL="0" marR="0" lvl="0" indent="0" algn="ctr" defTabSz="457200" rtl="0" eaLnBrk="1" fontAlgn="auto" latinLnBrk="0" hangingPunct="1">
-              <a:lnSpc>
-                <a:spcPct val="100000"/>
-              </a:lnSpc>
-              <a:spcBef>
-                <a:spcPts val="0"/>
-              </a:spcBef>
-              <a:spcAft>
-                <a:spcPts val="0"/>
-              </a:spcAft>
-              <a:buClrTx/>
-              <a:buSzTx/>
-              <a:buFontTx/>
-              <a:buNone/>
-              <a:tabLst/>
+            <a:pPr algn="ctr" defTabSz="1083747">
               <a:defRPr/>
             </a:pPr>
             <a:r>
-              <a:rPr kumimoji="0" lang="en-US" sz="1800" b="0" i="0" u="none" strike="noStrike" kern="1200" cap="none" spc="0" normalizeH="0" baseline="0" noProof="0" dirty="0">
-                <a:ln>
-                  <a:noFill/>
-                </a:ln>
+              <a:rPr lang="en-US" sz="4267" dirty="0">
                 <a:solidFill>
                   <a:prstClr val="white"/>
                 </a:solidFill>
-                <a:effectLst/>
-                <a:uLnTx/>
-                <a:uFillTx/>
                 <a:latin typeface="Aptos" panose="02110004020202020204"/>
-                <a:ea typeface="+mn-ea"/>
-                <a:cs typeface="+mn-cs"/>
               </a:rPr>
               <a:t>Motor</a:t>
             </a:r>
@@ -3884,8 +3618,8 @@
         </p:nvSpPr>
         <p:spPr>
           <a:xfrm>
-            <a:off x="-3945465" y="1818304"/>
-            <a:ext cx="2416628" cy="833790"/>
+            <a:off x="-9352213" y="-4043724"/>
+            <a:ext cx="5728303" cy="1976391"/>
           </a:xfrm>
           <a:prstGeom prst="rect">
             <a:avLst/>
@@ -3919,37 +3653,15 @@
           <a:bodyPr rtlCol="0" anchor="ctr"/>
           <a:lstStyle/>
           <a:p>
-            <a:pPr marL="0" marR="0" lvl="0" indent="0" algn="ctr" defTabSz="457200" rtl="0" eaLnBrk="1" fontAlgn="auto" latinLnBrk="0" hangingPunct="1">
-              <a:lnSpc>
-                <a:spcPct val="100000"/>
-              </a:lnSpc>
-              <a:spcBef>
-                <a:spcPts val="0"/>
-              </a:spcBef>
-              <a:spcAft>
-                <a:spcPts val="0"/>
-              </a:spcAft>
-              <a:buClrTx/>
-              <a:buSzTx/>
-              <a:buFontTx/>
-              <a:buNone/>
-              <a:tabLst/>
+            <a:pPr algn="ctr" defTabSz="1083747">
               <a:defRPr/>
             </a:pPr>
             <a:r>
-              <a:rPr kumimoji="0" lang="en-US" sz="1800" b="0" i="0" u="none" strike="noStrike" kern="1200" cap="none" spc="0" normalizeH="0" baseline="0" noProof="0" dirty="0">
-                <a:ln>
-                  <a:noFill/>
-                </a:ln>
+              <a:rPr lang="en-US" sz="4267" dirty="0">
                 <a:solidFill>
                   <a:prstClr val="white"/>
                 </a:solidFill>
-                <a:effectLst/>
-                <a:uLnTx/>
-                <a:uFillTx/>
                 <a:latin typeface="Aptos" panose="02110004020202020204"/>
-                <a:ea typeface="+mn-ea"/>
-                <a:cs typeface="+mn-cs"/>
               </a:rPr>
               <a:t>Arduino Controller</a:t>
             </a:r>
@@ -3973,8 +3685,8 @@
         </p:nvCxnSpPr>
         <p:spPr>
           <a:xfrm flipH="1" flipV="1">
-            <a:off x="-1528837" y="2235199"/>
-            <a:ext cx="3603172" cy="1713468"/>
+            <a:off x="-3623910" y="-3055528"/>
+            <a:ext cx="8540852" cy="4061554"/>
           </a:xfrm>
           <a:prstGeom prst="straightConnector1">
             <a:avLst/>
@@ -4016,8 +3728,8 @@
         </p:nvCxnSpPr>
         <p:spPr>
           <a:xfrm flipH="1" flipV="1">
-            <a:off x="-1528837" y="2235199"/>
-            <a:ext cx="2612571" cy="2286000"/>
+            <a:off x="-3623909" y="-3055528"/>
+            <a:ext cx="6192761" cy="5418667"/>
           </a:xfrm>
           <a:prstGeom prst="straightConnector1">
             <a:avLst/>
@@ -4059,8 +3771,8 @@
         </p:nvCxnSpPr>
         <p:spPr>
           <a:xfrm flipH="1" flipV="1">
-            <a:off x="-1528837" y="2235199"/>
-            <a:ext cx="2612571" cy="474134"/>
+            <a:off x="-3623909" y="-3055528"/>
+            <a:ext cx="6192761" cy="1123873"/>
           </a:xfrm>
           <a:prstGeom prst="straightConnector1">
             <a:avLst/>
@@ -4102,8 +3814,8 @@
         </p:nvCxnSpPr>
         <p:spPr>
           <a:xfrm flipH="1">
-            <a:off x="-1528837" y="2159000"/>
-            <a:ext cx="3645505" cy="76199"/>
+            <a:off x="-3623909" y="-3236147"/>
+            <a:ext cx="8641197" cy="180620"/>
           </a:xfrm>
           <a:prstGeom prst="straightConnector1">
             <a:avLst/>
@@ -4141,8 +3853,8 @@
         </p:nvSpPr>
         <p:spPr>
           <a:xfrm>
-            <a:off x="-5401731" y="1818304"/>
-            <a:ext cx="956734" cy="833790"/>
+            <a:off x="-12804103" y="-4043724"/>
+            <a:ext cx="2267814" cy="1976391"/>
           </a:xfrm>
           <a:prstGeom prst="rect">
             <a:avLst/>
@@ -4176,25 +3888,11 @@
           <a:bodyPr rtlCol="0" anchor="ctr"/>
           <a:lstStyle/>
           <a:p>
-            <a:pPr marL="0" marR="0" lvl="0" indent="0" algn="ctr" defTabSz="457200" rtl="0" eaLnBrk="1" fontAlgn="auto" latinLnBrk="0" hangingPunct="1">
-              <a:lnSpc>
-                <a:spcPct val="100000"/>
-              </a:lnSpc>
-              <a:spcBef>
-                <a:spcPts val="0"/>
-              </a:spcBef>
-              <a:spcAft>
-                <a:spcPts val="0"/>
-              </a:spcAft>
-              <a:buClrTx/>
-              <a:buSzTx/>
-              <a:buFontTx/>
-              <a:buNone/>
-              <a:tabLst/>
+            <a:pPr algn="ctr" defTabSz="1083747">
               <a:defRPr/>
             </a:pPr>
             <a:r>
-              <a:rPr lang="en-US" dirty="0">
+              <a:rPr lang="en-US" sz="4267" dirty="0">
                 <a:solidFill>
                   <a:prstClr val="white"/>
                 </a:solidFill>
@@ -4202,20 +3900,6 @@
               </a:rPr>
               <a:t>ESP32</a:t>
             </a:r>
-            <a:endParaRPr kumimoji="0" lang="en-US" sz="1800" b="0" i="0" u="none" strike="noStrike" kern="1200" cap="none" spc="0" normalizeH="0" baseline="0" noProof="0" dirty="0">
-              <a:ln>
-                <a:noFill/>
-              </a:ln>
-              <a:solidFill>
-                <a:prstClr val="white"/>
-              </a:solidFill>
-              <a:effectLst/>
-              <a:uLnTx/>
-              <a:uFillTx/>
-              <a:latin typeface="Aptos" panose="02110004020202020204"/>
-              <a:ea typeface="+mn-ea"/>
-              <a:cs typeface="+mn-cs"/>
-            </a:endParaRPr>
           </a:p>
         </p:txBody>
       </p:sp>
@@ -4237,8 +3921,8 @@
         </p:nvCxnSpPr>
         <p:spPr>
           <a:xfrm>
-            <a:off x="-4444997" y="2235199"/>
-            <a:ext cx="499532" cy="0"/>
+            <a:off x="-10536289" y="-3055528"/>
+            <a:ext cx="1184076" cy="0"/>
           </a:xfrm>
           <a:prstGeom prst="straightConnector1">
             <a:avLst/>
@@ -4286,8 +3970,8 @@
         </p:nvCxnSpPr>
         <p:spPr>
           <a:xfrm>
-            <a:off x="-4923364" y="2652094"/>
-            <a:ext cx="0" cy="561181"/>
+            <a:off x="-11670196" y="-2067332"/>
+            <a:ext cx="0" cy="1330207"/>
           </a:xfrm>
           <a:prstGeom prst="straightConnector1">
             <a:avLst/>
@@ -4331,8 +4015,8 @@
         </p:nvSpPr>
         <p:spPr>
           <a:xfrm>
-            <a:off x="-6131678" y="3213275"/>
-            <a:ext cx="2416628" cy="833790"/>
+            <a:off x="-14534347" y="-737126"/>
+            <a:ext cx="5728303" cy="1976391"/>
           </a:xfrm>
           <a:prstGeom prst="rect">
             <a:avLst/>
@@ -4366,25 +4050,11 @@
           <a:bodyPr rtlCol="0" anchor="ctr"/>
           <a:lstStyle/>
           <a:p>
-            <a:pPr marL="0" marR="0" lvl="0" indent="0" algn="ctr" defTabSz="457200" rtl="0" eaLnBrk="1" fontAlgn="auto" latinLnBrk="0" hangingPunct="1">
-              <a:lnSpc>
-                <a:spcPct val="100000"/>
-              </a:lnSpc>
-              <a:spcBef>
-                <a:spcPts val="0"/>
-              </a:spcBef>
-              <a:spcAft>
-                <a:spcPts val="0"/>
-              </a:spcAft>
-              <a:buClrTx/>
-              <a:buSzTx/>
-              <a:buFontTx/>
-              <a:buNone/>
-              <a:tabLst/>
+            <a:pPr algn="ctr" defTabSz="1083747">
               <a:defRPr/>
             </a:pPr>
             <a:r>
-              <a:rPr lang="en-US" dirty="0">
+              <a:rPr lang="en-US" sz="4267" dirty="0">
                 <a:solidFill>
                   <a:prstClr val="white"/>
                 </a:solidFill>
@@ -4392,20 +4062,6 @@
               </a:rPr>
               <a:t>Web Application</a:t>
             </a:r>
-            <a:endParaRPr kumimoji="0" lang="en-US" sz="1800" b="0" i="0" u="none" strike="noStrike" kern="1200" cap="none" spc="0" normalizeH="0" baseline="0" noProof="0" dirty="0">
-              <a:ln>
-                <a:noFill/>
-              </a:ln>
-              <a:solidFill>
-                <a:prstClr val="white"/>
-              </a:solidFill>
-              <a:effectLst/>
-              <a:uLnTx/>
-              <a:uFillTx/>
-              <a:latin typeface="Aptos" panose="02110004020202020204"/>
-              <a:ea typeface="+mn-ea"/>
-              <a:cs typeface="+mn-cs"/>
-            </a:endParaRPr>
           </a:p>
         </p:txBody>
       </p:sp>
@@ -4453,8 +4109,8 @@
         </p:nvSpPr>
         <p:spPr>
           <a:xfrm>
-            <a:off x="1227668" y="5367866"/>
-            <a:ext cx="1761066" cy="812800"/>
+            <a:off x="2910028" y="4370053"/>
+            <a:ext cx="4174379" cy="1926637"/>
           </a:xfrm>
           <a:prstGeom prst="rect">
             <a:avLst/>
@@ -4480,7 +4136,7 @@
           <a:p>
             <a:pPr algn="ctr"/>
             <a:r>
-              <a:rPr lang="en-US" dirty="0"/>
+              <a:rPr lang="en-US" sz="4267" dirty="0"/>
               <a:t>Node.js Server</a:t>
             </a:r>
           </a:p>
@@ -4500,8 +4156,8 @@
         </p:nvSpPr>
         <p:spPr>
           <a:xfrm>
-            <a:off x="1354667" y="457200"/>
-            <a:ext cx="1507066" cy="795867"/>
+            <a:off x="3211062" y="-7270043"/>
+            <a:ext cx="3572305" cy="1886500"/>
           </a:xfrm>
           <a:prstGeom prst="ellipse">
             <a:avLst/>
@@ -4527,7 +4183,7 @@
           <a:p>
             <a:pPr algn="ctr"/>
             <a:r>
-              <a:rPr lang="en-US" dirty="0"/>
+              <a:rPr lang="en-US" sz="4267" dirty="0"/>
               <a:t>Web User</a:t>
             </a:r>
           </a:p>
@@ -4547,8 +4203,8 @@
         </p:nvSpPr>
         <p:spPr>
           <a:xfrm>
-            <a:off x="1092200" y="3073399"/>
-            <a:ext cx="2032000" cy="626533"/>
+            <a:off x="2588918" y="-1068683"/>
+            <a:ext cx="4816593" cy="1485115"/>
           </a:xfrm>
           <a:prstGeom prst="rect">
             <a:avLst/>
@@ -4574,7 +4230,7 @@
           <a:p>
             <a:pPr algn="ctr"/>
             <a:r>
-              <a:rPr lang="en-US" dirty="0"/>
+              <a:rPr lang="en-US" sz="4267" dirty="0"/>
               <a:t>To-Do list Website</a:t>
             </a:r>
           </a:p>
@@ -4594,8 +4250,8 @@
         </p:nvSpPr>
         <p:spPr>
           <a:xfrm>
-            <a:off x="1100668" y="9533468"/>
-            <a:ext cx="2031999" cy="812800"/>
+            <a:off x="2608992" y="14244072"/>
+            <a:ext cx="4816590" cy="1926637"/>
           </a:xfrm>
           <a:prstGeom prst="rect">
             <a:avLst/>
@@ -4621,11 +4277,11 @@
           <a:p>
             <a:pPr algn="ctr"/>
             <a:r>
-              <a:rPr lang="en-US" dirty="0" err="1"/>
+              <a:rPr lang="en-US" sz="4267" dirty="0" err="1"/>
               <a:t>Sql</a:t>
             </a:r>
             <a:r>
-              <a:rPr lang="en-US" dirty="0"/>
+              <a:rPr lang="en-US" sz="4267" dirty="0"/>
               <a:t> Database</a:t>
             </a:r>
           </a:p>
@@ -4648,8 +4304,8 @@
         </p:nvCxnSpPr>
         <p:spPr>
           <a:xfrm>
-            <a:off x="2108200" y="1253067"/>
-            <a:ext cx="0" cy="1820332"/>
+            <a:off x="4997215" y="-5383545"/>
+            <a:ext cx="0" cy="4314861"/>
           </a:xfrm>
           <a:prstGeom prst="straightConnector1">
             <a:avLst/>
@@ -4691,8 +4347,8 @@
         </p:nvCxnSpPr>
         <p:spPr>
           <a:xfrm>
-            <a:off x="2108200" y="3699932"/>
-            <a:ext cx="1" cy="1667934"/>
+            <a:off x="4997216" y="416432"/>
+            <a:ext cx="2" cy="3953621"/>
           </a:xfrm>
           <a:prstGeom prst="straightConnector1">
             <a:avLst/>
@@ -4734,8 +4390,8 @@
         </p:nvCxnSpPr>
         <p:spPr>
           <a:xfrm>
-            <a:off x="2108200" y="6180666"/>
-            <a:ext cx="8468" cy="1270001"/>
+            <a:off x="4997215" y="6296691"/>
+            <a:ext cx="20072" cy="3010373"/>
           </a:xfrm>
           <a:prstGeom prst="straightConnector1">
             <a:avLst/>
@@ -4774,8 +4430,8 @@
         </p:nvSpPr>
         <p:spPr>
           <a:xfrm>
-            <a:off x="1100668" y="7450667"/>
-            <a:ext cx="2031999" cy="812800"/>
+            <a:off x="2608992" y="9307063"/>
+            <a:ext cx="4816590" cy="1926637"/>
           </a:xfrm>
           <a:prstGeom prst="rect">
             <a:avLst/>
@@ -4801,7 +4457,7 @@
           <a:p>
             <a:pPr algn="ctr"/>
             <a:r>
-              <a:rPr lang="en-US" dirty="0"/>
+              <a:rPr lang="en-US" sz="4267" dirty="0"/>
               <a:t>Database Controller</a:t>
             </a:r>
           </a:p>
@@ -4825,8 +4481,8 @@
         </p:nvCxnSpPr>
         <p:spPr>
           <a:xfrm>
-            <a:off x="2116668" y="8263467"/>
-            <a:ext cx="0" cy="1270001"/>
+            <a:off x="5017287" y="11233701"/>
+            <a:ext cx="0" cy="3010373"/>
           </a:xfrm>
           <a:prstGeom prst="straightConnector1">
             <a:avLst/>
@@ -4865,8 +4521,8 @@
         </p:nvSpPr>
         <p:spPr>
           <a:xfrm>
-            <a:off x="4741334" y="7467600"/>
-            <a:ext cx="1507066" cy="795867"/>
+            <a:off x="11238717" y="9347201"/>
+            <a:ext cx="3572305" cy="1886500"/>
           </a:xfrm>
           <a:prstGeom prst="ellipse">
             <a:avLst/>
@@ -4892,7 +4548,7 @@
           <a:p>
             <a:pPr algn="ctr"/>
             <a:r>
-              <a:rPr lang="en-US" dirty="0"/>
+              <a:rPr lang="en-US" sz="4267" dirty="0"/>
               <a:t>Web User</a:t>
             </a:r>
           </a:p>
@@ -4915,8 +4571,8 @@
         </p:nvCxnSpPr>
         <p:spPr>
           <a:xfrm>
-            <a:off x="3132667" y="7857067"/>
-            <a:ext cx="1608667" cy="8467"/>
+            <a:off x="7425582" y="10270382"/>
+            <a:ext cx="3813137" cy="20070"/>
           </a:xfrm>
           <a:prstGeom prst="straightConnector1">
             <a:avLst/>
@@ -4945,6 +4601,467 @@
     <p:extLst>
       <p:ext uri="{BB962C8B-B14F-4D97-AF65-F5344CB8AC3E}">
         <p14:creationId xmlns:p14="http://schemas.microsoft.com/office/powerpoint/2010/main" val="1281802143"/>
+      </p:ext>
+    </p:extLst>
+  </p:cSld>
+  <p:clrMapOvr>
+    <a:masterClrMapping/>
+  </p:clrMapOvr>
+</p:sld>
+</file>
+
+<file path=ppt/slides/slide3.xml><?xml version="1.0" encoding="utf-8"?>
+<p:sld xmlns:a="http://schemas.openxmlformats.org/drawingml/2006/main" xmlns:r="http://schemas.openxmlformats.org/officeDocument/2006/relationships" xmlns:p="http://schemas.openxmlformats.org/presentationml/2006/main">
+  <p:cSld>
+    <p:spTree>
+      <p:nvGrpSpPr>
+        <p:cNvPr id="1" name="">
+          <a:extLst>
+            <a:ext uri="{FF2B5EF4-FFF2-40B4-BE49-F238E27FC236}">
+              <a16:creationId xmlns:a16="http://schemas.microsoft.com/office/drawing/2014/main" id="{350008EC-CC5D-C411-4529-08B51D15197D}"/>
+            </a:ext>
+          </a:extLst>
+        </p:cNvPr>
+        <p:cNvGrpSpPr/>
+        <p:nvPr/>
+      </p:nvGrpSpPr>
+      <p:grpSpPr>
+        <a:xfrm>
+          <a:off x="0" y="0"/>
+          <a:ext cx="0" cy="0"/>
+          <a:chOff x="0" y="0"/>
+          <a:chExt cx="0" cy="0"/>
+        </a:xfrm>
+      </p:grpSpPr>
+      <p:sp>
+        <p:nvSpPr>
+          <p:cNvPr id="4" name="Rectangle 3">
+            <a:extLst>
+              <a:ext uri="{FF2B5EF4-FFF2-40B4-BE49-F238E27FC236}">
+                <a16:creationId xmlns:a16="http://schemas.microsoft.com/office/drawing/2014/main" id="{C92414E3-0641-4A5D-0A1B-3B07CD017EEC}"/>
+              </a:ext>
+            </a:extLst>
+          </p:cNvPr>
+          <p:cNvSpPr/>
+          <p:nvPr/>
+        </p:nvSpPr>
+        <p:spPr>
+          <a:xfrm>
+            <a:off x="4626807" y="7899012"/>
+            <a:ext cx="4174379" cy="1926637"/>
+          </a:xfrm>
+          <a:prstGeom prst="rect">
+            <a:avLst/>
+          </a:prstGeom>
+        </p:spPr>
+        <p:style>
+          <a:lnRef idx="2">
+            <a:schemeClr val="dk1"/>
+          </a:lnRef>
+          <a:fillRef idx="1">
+            <a:schemeClr val="lt1"/>
+          </a:fillRef>
+          <a:effectRef idx="0">
+            <a:schemeClr val="dk1"/>
+          </a:effectRef>
+          <a:fontRef idx="minor">
+            <a:schemeClr val="dk1"/>
+          </a:fontRef>
+        </p:style>
+        <p:txBody>
+          <a:bodyPr rtlCol="0" anchor="ctr"/>
+          <a:lstStyle/>
+          <a:p>
+            <a:pPr algn="ctr"/>
+            <a:r>
+              <a:rPr lang="en-US" sz="4267" dirty="0"/>
+              <a:t>Node.js Server</a:t>
+            </a:r>
+          </a:p>
+        </p:txBody>
+      </p:sp>
+      <p:sp>
+        <p:nvSpPr>
+          <p:cNvPr id="5" name="Oval 4">
+            <a:extLst>
+              <a:ext uri="{FF2B5EF4-FFF2-40B4-BE49-F238E27FC236}">
+                <a16:creationId xmlns:a16="http://schemas.microsoft.com/office/drawing/2014/main" id="{3F8478F3-DEA3-8C31-CB3C-0384B3D71909}"/>
+              </a:ext>
+            </a:extLst>
+          </p:cNvPr>
+          <p:cNvSpPr/>
+          <p:nvPr/>
+        </p:nvSpPr>
+        <p:spPr>
+          <a:xfrm>
+            <a:off x="323073" y="3544470"/>
+            <a:ext cx="3572305" cy="1886500"/>
+          </a:xfrm>
+          <a:prstGeom prst="ellipse">
+            <a:avLst/>
+          </a:prstGeom>
+        </p:spPr>
+        <p:style>
+          <a:lnRef idx="2">
+            <a:schemeClr val="dk1"/>
+          </a:lnRef>
+          <a:fillRef idx="1">
+            <a:schemeClr val="lt1"/>
+          </a:fillRef>
+          <a:effectRef idx="0">
+            <a:schemeClr val="dk1"/>
+          </a:effectRef>
+          <a:fontRef idx="minor">
+            <a:schemeClr val="dk1"/>
+          </a:fontRef>
+        </p:style>
+        <p:txBody>
+          <a:bodyPr rtlCol="0" anchor="ctr"/>
+          <a:lstStyle/>
+          <a:p>
+            <a:pPr algn="ctr"/>
+            <a:r>
+              <a:rPr lang="en-US" sz="4267" dirty="0"/>
+              <a:t>Clients</a:t>
+            </a:r>
+          </a:p>
+        </p:txBody>
+      </p:sp>
+      <p:sp>
+        <p:nvSpPr>
+          <p:cNvPr id="6" name="Rectangle 5">
+            <a:extLst>
+              <a:ext uri="{FF2B5EF4-FFF2-40B4-BE49-F238E27FC236}">
+                <a16:creationId xmlns:a16="http://schemas.microsoft.com/office/drawing/2014/main" id="{3FB403A9-9824-5515-7628-6D1606051C40}"/>
+              </a:ext>
+            </a:extLst>
+          </p:cNvPr>
+          <p:cNvSpPr/>
+          <p:nvPr/>
+        </p:nvSpPr>
+        <p:spPr>
+          <a:xfrm>
+            <a:off x="7322357" y="1128059"/>
+            <a:ext cx="4816593" cy="1485115"/>
+          </a:xfrm>
+          <a:prstGeom prst="rect">
+            <a:avLst/>
+          </a:prstGeom>
+        </p:spPr>
+        <p:style>
+          <a:lnRef idx="2">
+            <a:schemeClr val="dk1"/>
+          </a:lnRef>
+          <a:fillRef idx="1">
+            <a:schemeClr val="lt1"/>
+          </a:fillRef>
+          <a:effectRef idx="0">
+            <a:schemeClr val="dk1"/>
+          </a:effectRef>
+          <a:fontRef idx="minor">
+            <a:schemeClr val="dk1"/>
+          </a:fontRef>
+        </p:style>
+        <p:txBody>
+          <a:bodyPr rtlCol="0" anchor="ctr"/>
+          <a:lstStyle/>
+          <a:p>
+            <a:pPr algn="ctr"/>
+            <a:r>
+              <a:rPr lang="en-US" sz="4267" dirty="0"/>
+              <a:t>To-Do list Website</a:t>
+            </a:r>
+          </a:p>
+        </p:txBody>
+      </p:sp>
+      <p:sp>
+        <p:nvSpPr>
+          <p:cNvPr id="7" name="Rectangle 6">
+            <a:extLst>
+              <a:ext uri="{FF2B5EF4-FFF2-40B4-BE49-F238E27FC236}">
+                <a16:creationId xmlns:a16="http://schemas.microsoft.com/office/drawing/2014/main" id="{734945DE-5B4C-CDA2-45A2-AA2464ACA48F}"/>
+              </a:ext>
+            </a:extLst>
+          </p:cNvPr>
+          <p:cNvSpPr/>
+          <p:nvPr/>
+        </p:nvSpPr>
+        <p:spPr>
+          <a:xfrm>
+            <a:off x="10894662" y="7899012"/>
+            <a:ext cx="4816590" cy="1926637"/>
+          </a:xfrm>
+          <a:prstGeom prst="rect">
+            <a:avLst/>
+          </a:prstGeom>
+        </p:spPr>
+        <p:style>
+          <a:lnRef idx="2">
+            <a:schemeClr val="dk1"/>
+          </a:lnRef>
+          <a:fillRef idx="1">
+            <a:schemeClr val="lt1"/>
+          </a:fillRef>
+          <a:effectRef idx="0">
+            <a:schemeClr val="dk1"/>
+          </a:effectRef>
+          <a:fontRef idx="minor">
+            <a:schemeClr val="dk1"/>
+          </a:fontRef>
+        </p:style>
+        <p:txBody>
+          <a:bodyPr rtlCol="0" anchor="ctr"/>
+          <a:lstStyle/>
+          <a:p>
+            <a:pPr algn="ctr"/>
+            <a:r>
+              <a:rPr lang="en-US" sz="4267" dirty="0"/>
+              <a:t>SQL Database</a:t>
+            </a:r>
+          </a:p>
+        </p:txBody>
+      </p:sp>
+      <p:cxnSp>
+        <p:nvCxnSpPr>
+          <p:cNvPr id="9" name="Straight Arrow Connector 8">
+            <a:extLst>
+              <a:ext uri="{FF2B5EF4-FFF2-40B4-BE49-F238E27FC236}">
+                <a16:creationId xmlns:a16="http://schemas.microsoft.com/office/drawing/2014/main" id="{C4BA5E49-BD5E-4F0C-1851-6C0AF4D5C5F7}"/>
+              </a:ext>
+            </a:extLst>
+          </p:cNvPr>
+          <p:cNvCxnSpPr>
+            <a:cxnSpLocks/>
+            <a:stCxn id="5" idx="6"/>
+            <a:endCxn id="6" idx="1"/>
+          </p:cNvCxnSpPr>
+          <p:nvPr/>
+        </p:nvCxnSpPr>
+        <p:spPr>
+          <a:xfrm flipV="1">
+            <a:off x="3895378" y="1870617"/>
+            <a:ext cx="3426979" cy="2617103"/>
+          </a:xfrm>
+          <a:prstGeom prst="straightConnector1">
+            <a:avLst/>
+          </a:prstGeom>
+          <a:ln>
+            <a:headEnd type="triangle"/>
+            <a:tailEnd type="triangle"/>
+          </a:ln>
+        </p:spPr>
+        <p:style>
+          <a:lnRef idx="2">
+            <a:schemeClr val="accent1"/>
+          </a:lnRef>
+          <a:fillRef idx="0">
+            <a:schemeClr val="accent1"/>
+          </a:fillRef>
+          <a:effectRef idx="1">
+            <a:schemeClr val="accent1"/>
+          </a:effectRef>
+          <a:fontRef idx="minor">
+            <a:schemeClr val="tx1"/>
+          </a:fontRef>
+        </p:style>
+      </p:cxnSp>
+      <p:cxnSp>
+        <p:nvCxnSpPr>
+          <p:cNvPr id="11" name="Straight Arrow Connector 10">
+            <a:extLst>
+              <a:ext uri="{FF2B5EF4-FFF2-40B4-BE49-F238E27FC236}">
+                <a16:creationId xmlns:a16="http://schemas.microsoft.com/office/drawing/2014/main" id="{2589293D-ED07-7A85-178E-310BCD698433}"/>
+              </a:ext>
+            </a:extLst>
+          </p:cNvPr>
+          <p:cNvCxnSpPr>
+            <a:cxnSpLocks/>
+            <a:endCxn id="4" idx="0"/>
+          </p:cNvCxnSpPr>
+          <p:nvPr/>
+        </p:nvCxnSpPr>
+        <p:spPr>
+          <a:xfrm>
+            <a:off x="3929228" y="4581437"/>
+            <a:ext cx="2784769" cy="3317575"/>
+          </a:xfrm>
+          <a:prstGeom prst="straightConnector1">
+            <a:avLst/>
+          </a:prstGeom>
+          <a:ln>
+            <a:headEnd type="triangle"/>
+            <a:tailEnd type="triangle"/>
+          </a:ln>
+        </p:spPr>
+        <p:style>
+          <a:lnRef idx="2">
+            <a:schemeClr val="accent1"/>
+          </a:lnRef>
+          <a:fillRef idx="0">
+            <a:schemeClr val="accent1"/>
+          </a:fillRef>
+          <a:effectRef idx="1">
+            <a:schemeClr val="accent1"/>
+          </a:effectRef>
+          <a:fontRef idx="minor">
+            <a:schemeClr val="tx1"/>
+          </a:fontRef>
+        </p:style>
+      </p:cxnSp>
+      <p:cxnSp>
+        <p:nvCxnSpPr>
+          <p:cNvPr id="13" name="Straight Arrow Connector 12">
+            <a:extLst>
+              <a:ext uri="{FF2B5EF4-FFF2-40B4-BE49-F238E27FC236}">
+                <a16:creationId xmlns:a16="http://schemas.microsoft.com/office/drawing/2014/main" id="{9E85F626-0F66-1FCA-1EDF-8CCC2DD1ADE8}"/>
+              </a:ext>
+            </a:extLst>
+          </p:cNvPr>
+          <p:cNvCxnSpPr>
+            <a:cxnSpLocks/>
+            <a:stCxn id="4" idx="3"/>
+          </p:cNvCxnSpPr>
+          <p:nvPr/>
+        </p:nvCxnSpPr>
+        <p:spPr>
+          <a:xfrm flipV="1">
+            <a:off x="8801186" y="8862330"/>
+            <a:ext cx="2093476" cy="1"/>
+          </a:xfrm>
+          <a:prstGeom prst="straightConnector1">
+            <a:avLst/>
+          </a:prstGeom>
+          <a:ln>
+            <a:headEnd type="triangle"/>
+            <a:tailEnd type="triangle"/>
+          </a:ln>
+        </p:spPr>
+        <p:style>
+          <a:lnRef idx="2">
+            <a:schemeClr val="accent1"/>
+          </a:lnRef>
+          <a:fillRef idx="0">
+            <a:schemeClr val="accent1"/>
+          </a:fillRef>
+          <a:effectRef idx="1">
+            <a:schemeClr val="accent1"/>
+          </a:effectRef>
+          <a:fontRef idx="minor">
+            <a:schemeClr val="tx1"/>
+          </a:fontRef>
+        </p:style>
+      </p:cxnSp>
+      <p:sp>
+        <p:nvSpPr>
+          <p:cNvPr id="19" name="TextBox 18">
+            <a:extLst>
+              <a:ext uri="{FF2B5EF4-FFF2-40B4-BE49-F238E27FC236}">
+                <a16:creationId xmlns:a16="http://schemas.microsoft.com/office/drawing/2014/main" id="{F66364FA-61EC-7197-CF9C-65BD1D79C0BE}"/>
+              </a:ext>
+            </a:extLst>
+          </p:cNvPr>
+          <p:cNvSpPr txBox="1"/>
+          <p:nvPr/>
+        </p:nvSpPr>
+        <p:spPr>
+          <a:xfrm rot="19319609">
+            <a:off x="3252476" y="2140505"/>
+            <a:ext cx="4816590" cy="748988"/>
+          </a:xfrm>
+          <a:prstGeom prst="rect">
+            <a:avLst/>
+          </a:prstGeom>
+          <a:noFill/>
+        </p:spPr>
+        <p:txBody>
+          <a:bodyPr wrap="square" rtlCol="0">
+            <a:spAutoFit/>
+          </a:bodyPr>
+          <a:lstStyle/>
+          <a:p>
+            <a:r>
+              <a:rPr lang="en-US" sz="4267" dirty="0"/>
+              <a:t>nginx Web Server</a:t>
+            </a:r>
+          </a:p>
+        </p:txBody>
+      </p:sp>
+      <p:sp>
+        <p:nvSpPr>
+          <p:cNvPr id="20" name="TextBox 19">
+            <a:extLst>
+              <a:ext uri="{FF2B5EF4-FFF2-40B4-BE49-F238E27FC236}">
+                <a16:creationId xmlns:a16="http://schemas.microsoft.com/office/drawing/2014/main" id="{BA9074DB-C738-A71A-9AA5-3127A283B5C8}"/>
+              </a:ext>
+            </a:extLst>
+          </p:cNvPr>
+          <p:cNvSpPr txBox="1"/>
+          <p:nvPr/>
+        </p:nvSpPr>
+        <p:spPr>
+          <a:xfrm rot="2925070">
+            <a:off x="4114514" y="5597881"/>
+            <a:ext cx="3092513" cy="748988"/>
+          </a:xfrm>
+          <a:prstGeom prst="rect">
+            <a:avLst/>
+          </a:prstGeom>
+          <a:noFill/>
+        </p:spPr>
+        <p:txBody>
+          <a:bodyPr wrap="none" rtlCol="0">
+            <a:spAutoFit/>
+          </a:bodyPr>
+          <a:lstStyle/>
+          <a:p>
+            <a:r>
+              <a:rPr lang="en-US" sz="4267" dirty="0" err="1"/>
+              <a:t>Websockets</a:t>
+            </a:r>
+            <a:endParaRPr lang="en-US" sz="4267" dirty="0"/>
+          </a:p>
+        </p:txBody>
+      </p:sp>
+      <p:sp>
+        <p:nvSpPr>
+          <p:cNvPr id="31" name="TextBox 30">
+            <a:extLst>
+              <a:ext uri="{FF2B5EF4-FFF2-40B4-BE49-F238E27FC236}">
+                <a16:creationId xmlns:a16="http://schemas.microsoft.com/office/drawing/2014/main" id="{34173884-8AD2-4FB2-24A0-D605CF64986A}"/>
+              </a:ext>
+            </a:extLst>
+          </p:cNvPr>
+          <p:cNvSpPr txBox="1"/>
+          <p:nvPr/>
+        </p:nvSpPr>
+        <p:spPr>
+          <a:xfrm>
+            <a:off x="8918700" y="8006177"/>
+            <a:ext cx="1623906" cy="748988"/>
+          </a:xfrm>
+          <a:prstGeom prst="rect">
+            <a:avLst/>
+          </a:prstGeom>
+          <a:noFill/>
+        </p:spPr>
+        <p:txBody>
+          <a:bodyPr wrap="none" rtlCol="0">
+            <a:spAutoFit/>
+          </a:bodyPr>
+          <a:lstStyle/>
+          <a:p>
+            <a:r>
+              <a:rPr lang="en-US" sz="4267" dirty="0" err="1"/>
+              <a:t>MySql</a:t>
+            </a:r>
+            <a:endParaRPr lang="en-US" sz="4267" dirty="0"/>
+          </a:p>
+        </p:txBody>
+      </p:sp>
+    </p:spTree>
+    <p:extLst>
+      <p:ext uri="{BB962C8B-B14F-4D97-AF65-F5344CB8AC3E}">
+        <p14:creationId xmlns:p14="http://schemas.microsoft.com/office/powerpoint/2010/main" val="997047613"/>
       </p:ext>
     </p:extLst>
   </p:cSld>
